--- a/课设汇报/GameTrade课程设计汇报.pptx
+++ b/课设汇报/GameTrade课程设计汇报.pptx
@@ -1,30 +1,30 @@
 
 <file path=ppt/presentation.xml><?xml version="1.0" encoding="utf-8"?>
-<p:presentation xmlns:a="http://schemas.openxmlformats.org/drawingml/2006/main" xmlns:r="http://schemas.openxmlformats.org/officeDocument/2006/relationships" xmlns:p="http://schemas.openxmlformats.org/presentationml/2006/main" saveSubsetFonts="1" autoCompressPictures="0">
+<p:presentation xmlns:a="http://schemas.openxmlformats.org/drawingml/2006/main" xmlns:r="http://schemas.openxmlformats.org/officeDocument/2006/relationships" xmlns:p="http://schemas.openxmlformats.org/presentationml/2006/main" autoCompressPictures="0">
   <p:sldMasterIdLst>
     <p:sldMasterId id="2147483648" r:id="rId1"/>
   </p:sldMasterIdLst>
   <p:sldIdLst>
-    <p:sldId id="256" r:id="rId7"/>
-    <p:sldId id="257" r:id="rId8"/>
-    <p:sldId id="258" r:id="rId9"/>
-    <p:sldId id="259" r:id="rId10"/>
-    <p:sldId id="260" r:id="rId11"/>
-    <p:sldId id="261" r:id="rId12"/>
-    <p:sldId id="262" r:id="rId13"/>
-    <p:sldId id="263" r:id="rId14"/>
-    <p:sldId id="264" r:id="rId15"/>
-    <p:sldId id="265" r:id="rId16"/>
-    <p:sldId id="266" r:id="rId17"/>
-    <p:sldId id="267" r:id="rId18"/>
-    <p:sldId id="268" r:id="rId19"/>
-    <p:sldId id="269" r:id="rId20"/>
-    <p:sldId id="270" r:id="rId21"/>
-    <p:sldId id="271" r:id="rId22"/>
-    <p:sldId id="272" r:id="rId23"/>
-    <p:sldId id="273" r:id="rId24"/>
+    <p:sldId id="256" r:id="rId3"/>
+    <p:sldId id="257" r:id="rId4"/>
+    <p:sldId id="258" r:id="rId5"/>
+    <p:sldId id="259" r:id="rId6"/>
+    <p:sldId id="260" r:id="rId7"/>
+    <p:sldId id="261" r:id="rId8"/>
+    <p:sldId id="262" r:id="rId9"/>
+    <p:sldId id="263" r:id="rId10"/>
+    <p:sldId id="264" r:id="rId11"/>
+    <p:sldId id="265" r:id="rId12"/>
+    <p:sldId id="266" r:id="rId13"/>
+    <p:sldId id="267" r:id="rId14"/>
+    <p:sldId id="268" r:id="rId15"/>
+    <p:sldId id="269" r:id="rId16"/>
+    <p:sldId id="270" r:id="rId17"/>
+    <p:sldId id="271" r:id="rId18"/>
+    <p:sldId id="272" r:id="rId19"/>
+    <p:sldId id="273" r:id="rId20"/>
   </p:sldIdLst>
-  <p:sldSz cx="12192119" cy="6858000" type="screen4x3"/>
+  <p:sldSz cx="12192000" cy="6858000" type="screen4x3"/>
   <p:notesSz cx="6858000" cy="9144000"/>
   <p:defaultTextStyle>
     <a:defPPr>
@@ -121,6 +121,22 @@
       </a:defRPr>
     </a:lvl9pPr>
   </p:defaultTextStyle>
+  <p:extLst>
+    <p:ext uri="{EFAFB233-063F-42B5-8137-9DF3F51BA10A}">
+      <p15:sldGuideLst xmlns:p15="http://schemas.microsoft.com/office/powerpoint/2012/main">
+        <p15:guide id="1" orient="horz" pos="2160" userDrawn="1">
+          <p15:clr>
+            <a:srgbClr val="A4A3A4"/>
+          </p15:clr>
+        </p15:guide>
+        <p15:guide id="2" pos="2880" userDrawn="1">
+          <p15:clr>
+            <a:srgbClr val="A4A3A4"/>
+          </p15:clr>
+        </p15:guide>
+      </p15:sldGuideLst>
+    </p:ext>
+  </p:extLst>
 </p:presentation>
 </file>
 
@@ -305,7 +321,6 @@
           <a:p>
             <a:fld id="{5BCAD085-E8A6-8845-BD4E-CB4CCA059FC4}" type="datetimeFigureOut">
               <a:rPr lang="en-US" smtClean="0"/>
-              <a:t>1/27/13</a:t>
             </a:fld>
             <a:endParaRPr lang="en-US"/>
           </a:p>
@@ -347,18 +362,12 @@
           <a:p>
             <a:fld id="{C1FF6DA9-008F-8B48-92A6-B652298478BF}" type="slidenum">
               <a:rPr lang="en-US" smtClean="0"/>
-              <a:t>‹#›</a:t>
             </a:fld>
             <a:endParaRPr lang="en-US"/>
           </a:p>
         </p:txBody>
       </p:sp>
     </p:spTree>
-    <p:extLst>
-      <p:ext uri="{BB962C8B-B14F-4D97-AF65-F5344CB8AC3E}">
-        <p14:creationId xmlns:p14="http://schemas.microsoft.com/office/powerpoint/2010/main" val="3168075583"/>
-      </p:ext>
-    </p:extLst>
   </p:cSld>
   <p:clrMapOvr>
     <a:masterClrMapping/>
@@ -426,6 +435,7 @@
               <a:rPr lang="en-US" smtClean="0"/>
               <a:t>Click to edit Master text styles</a:t>
             </a:r>
+            <a:endParaRPr lang="en-US" smtClean="0"/>
           </a:p>
           <a:p>
             <a:pPr lvl="1"/>
@@ -433,6 +443,7 @@
               <a:rPr lang="en-US" smtClean="0"/>
               <a:t>Second level</a:t>
             </a:r>
+            <a:endParaRPr lang="en-US" smtClean="0"/>
           </a:p>
           <a:p>
             <a:pPr lvl="2"/>
@@ -440,6 +451,7 @@
               <a:rPr lang="en-US" smtClean="0"/>
               <a:t>Third level</a:t>
             </a:r>
+            <a:endParaRPr lang="en-US" smtClean="0"/>
           </a:p>
           <a:p>
             <a:pPr lvl="3"/>
@@ -447,6 +459,7 @@
               <a:rPr lang="en-US" smtClean="0"/>
               <a:t>Fourth level</a:t>
             </a:r>
+            <a:endParaRPr lang="en-US" smtClean="0"/>
           </a:p>
           <a:p>
             <a:pPr lvl="4"/>
@@ -475,7 +488,6 @@
           <a:p>
             <a:fld id="{5BCAD085-E8A6-8845-BD4E-CB4CCA059FC4}" type="datetimeFigureOut">
               <a:rPr lang="en-US" smtClean="0"/>
-              <a:t>1/27/13</a:t>
             </a:fld>
             <a:endParaRPr lang="en-US"/>
           </a:p>
@@ -517,18 +529,12 @@
           <a:p>
             <a:fld id="{C1FF6DA9-008F-8B48-92A6-B652298478BF}" type="slidenum">
               <a:rPr lang="en-US" smtClean="0"/>
-              <a:t>‹#›</a:t>
             </a:fld>
             <a:endParaRPr lang="en-US"/>
           </a:p>
         </p:txBody>
       </p:sp>
     </p:spTree>
-    <p:extLst>
-      <p:ext uri="{BB962C8B-B14F-4D97-AF65-F5344CB8AC3E}">
-        <p14:creationId xmlns:p14="http://schemas.microsoft.com/office/powerpoint/2010/main" val="2910927964"/>
-      </p:ext>
-    </p:extLst>
   </p:cSld>
   <p:clrMapOvr>
     <a:masterClrMapping/>
@@ -606,6 +612,7 @@
               <a:rPr lang="en-US" smtClean="0"/>
               <a:t>Click to edit Master text styles</a:t>
             </a:r>
+            <a:endParaRPr lang="en-US" smtClean="0"/>
           </a:p>
           <a:p>
             <a:pPr lvl="1"/>
@@ -613,6 +620,7 @@
               <a:rPr lang="en-US" smtClean="0"/>
               <a:t>Second level</a:t>
             </a:r>
+            <a:endParaRPr lang="en-US" smtClean="0"/>
           </a:p>
           <a:p>
             <a:pPr lvl="2"/>
@@ -620,6 +628,7 @@
               <a:rPr lang="en-US" smtClean="0"/>
               <a:t>Third level</a:t>
             </a:r>
+            <a:endParaRPr lang="en-US" smtClean="0"/>
           </a:p>
           <a:p>
             <a:pPr lvl="3"/>
@@ -627,6 +636,7 @@
               <a:rPr lang="en-US" smtClean="0"/>
               <a:t>Fourth level</a:t>
             </a:r>
+            <a:endParaRPr lang="en-US" smtClean="0"/>
           </a:p>
           <a:p>
             <a:pPr lvl="4"/>
@@ -655,7 +665,6 @@
           <a:p>
             <a:fld id="{5BCAD085-E8A6-8845-BD4E-CB4CCA059FC4}" type="datetimeFigureOut">
               <a:rPr lang="en-US" smtClean="0"/>
-              <a:t>1/27/13</a:t>
             </a:fld>
             <a:endParaRPr lang="en-US"/>
           </a:p>
@@ -697,18 +706,12 @@
           <a:p>
             <a:fld id="{C1FF6DA9-008F-8B48-92A6-B652298478BF}" type="slidenum">
               <a:rPr lang="en-US" smtClean="0"/>
-              <a:t>‹#›</a:t>
             </a:fld>
             <a:endParaRPr lang="en-US"/>
           </a:p>
         </p:txBody>
       </p:sp>
     </p:spTree>
-    <p:extLst>
-      <p:ext uri="{BB962C8B-B14F-4D97-AF65-F5344CB8AC3E}">
-        <p14:creationId xmlns:p14="http://schemas.microsoft.com/office/powerpoint/2010/main" val="3612223792"/>
-      </p:ext>
-    </p:extLst>
   </p:cSld>
   <p:clrMapOvr>
     <a:masterClrMapping/>
@@ -776,6 +779,7 @@
               <a:rPr lang="en-US" smtClean="0"/>
               <a:t>Click to edit Master text styles</a:t>
             </a:r>
+            <a:endParaRPr lang="en-US" smtClean="0"/>
           </a:p>
           <a:p>
             <a:pPr lvl="1"/>
@@ -783,6 +787,7 @@
               <a:rPr lang="en-US" smtClean="0"/>
               <a:t>Second level</a:t>
             </a:r>
+            <a:endParaRPr lang="en-US" smtClean="0"/>
           </a:p>
           <a:p>
             <a:pPr lvl="2"/>
@@ -790,6 +795,7 @@
               <a:rPr lang="en-US" smtClean="0"/>
               <a:t>Third level</a:t>
             </a:r>
+            <a:endParaRPr lang="en-US" smtClean="0"/>
           </a:p>
           <a:p>
             <a:pPr lvl="3"/>
@@ -797,6 +803,7 @@
               <a:rPr lang="en-US" smtClean="0"/>
               <a:t>Fourth level</a:t>
             </a:r>
+            <a:endParaRPr lang="en-US" smtClean="0"/>
           </a:p>
           <a:p>
             <a:pPr lvl="4"/>
@@ -825,7 +832,6 @@
           <a:p>
             <a:fld id="{5BCAD085-E8A6-8845-BD4E-CB4CCA059FC4}" type="datetimeFigureOut">
               <a:rPr lang="en-US" smtClean="0"/>
-              <a:t>1/27/13</a:t>
             </a:fld>
             <a:endParaRPr lang="en-US"/>
           </a:p>
@@ -867,18 +873,12 @@
           <a:p>
             <a:fld id="{C1FF6DA9-008F-8B48-92A6-B652298478BF}" type="slidenum">
               <a:rPr lang="en-US" smtClean="0"/>
-              <a:t>‹#›</a:t>
             </a:fld>
             <a:endParaRPr lang="en-US"/>
           </a:p>
         </p:txBody>
       </p:sp>
     </p:spTree>
-    <p:extLst>
-      <p:ext uri="{BB962C8B-B14F-4D97-AF65-F5344CB8AC3E}">
-        <p14:creationId xmlns:p14="http://schemas.microsoft.com/office/powerpoint/2010/main" val="2614314258"/>
-      </p:ext>
-    </p:extLst>
   </p:cSld>
   <p:clrMapOvr>
     <a:masterClrMapping/>
@@ -1051,6 +1051,7 @@
               <a:rPr lang="en-US" smtClean="0"/>
               <a:t>Click to edit Master text styles</a:t>
             </a:r>
+            <a:endParaRPr lang="en-US" smtClean="0"/>
           </a:p>
         </p:txBody>
       </p:sp>
@@ -1071,7 +1072,6 @@
           <a:p>
             <a:fld id="{5BCAD085-E8A6-8845-BD4E-CB4CCA059FC4}" type="datetimeFigureOut">
               <a:rPr lang="en-US" smtClean="0"/>
-              <a:t>1/27/13</a:t>
             </a:fld>
             <a:endParaRPr lang="en-US"/>
           </a:p>
@@ -1113,18 +1113,12 @@
           <a:p>
             <a:fld id="{C1FF6DA9-008F-8B48-92A6-B652298478BF}" type="slidenum">
               <a:rPr lang="en-US" smtClean="0"/>
-              <a:t>‹#›</a:t>
             </a:fld>
             <a:endParaRPr lang="en-US"/>
           </a:p>
         </p:txBody>
       </p:sp>
     </p:spTree>
-    <p:extLst>
-      <p:ext uri="{BB962C8B-B14F-4D97-AF65-F5344CB8AC3E}">
-        <p14:creationId xmlns:p14="http://schemas.microsoft.com/office/powerpoint/2010/main" val="960648375"/>
-      </p:ext>
-    </p:extLst>
   </p:cSld>
   <p:clrMapOvr>
     <a:masterClrMapping/>
@@ -1225,6 +1219,7 @@
               <a:rPr lang="en-US" smtClean="0"/>
               <a:t>Click to edit Master text styles</a:t>
             </a:r>
+            <a:endParaRPr lang="en-US" smtClean="0"/>
           </a:p>
           <a:p>
             <a:pPr lvl="1"/>
@@ -1232,6 +1227,7 @@
               <a:rPr lang="en-US" smtClean="0"/>
               <a:t>Second level</a:t>
             </a:r>
+            <a:endParaRPr lang="en-US" smtClean="0"/>
           </a:p>
           <a:p>
             <a:pPr lvl="2"/>
@@ -1239,6 +1235,7 @@
               <a:rPr lang="en-US" smtClean="0"/>
               <a:t>Third level</a:t>
             </a:r>
+            <a:endParaRPr lang="en-US" smtClean="0"/>
           </a:p>
           <a:p>
             <a:pPr lvl="3"/>
@@ -1246,6 +1243,7 @@
               <a:rPr lang="en-US" smtClean="0"/>
               <a:t>Fourth level</a:t>
             </a:r>
+            <a:endParaRPr lang="en-US" smtClean="0"/>
           </a:p>
           <a:p>
             <a:pPr lvl="4"/>
@@ -1310,6 +1308,7 @@
               <a:rPr lang="en-US" smtClean="0"/>
               <a:t>Click to edit Master text styles</a:t>
             </a:r>
+            <a:endParaRPr lang="en-US" smtClean="0"/>
           </a:p>
           <a:p>
             <a:pPr lvl="1"/>
@@ -1317,6 +1316,7 @@
               <a:rPr lang="en-US" smtClean="0"/>
               <a:t>Second level</a:t>
             </a:r>
+            <a:endParaRPr lang="en-US" smtClean="0"/>
           </a:p>
           <a:p>
             <a:pPr lvl="2"/>
@@ -1324,6 +1324,7 @@
               <a:rPr lang="en-US" smtClean="0"/>
               <a:t>Third level</a:t>
             </a:r>
+            <a:endParaRPr lang="en-US" smtClean="0"/>
           </a:p>
           <a:p>
             <a:pPr lvl="3"/>
@@ -1331,6 +1332,7 @@
               <a:rPr lang="en-US" smtClean="0"/>
               <a:t>Fourth level</a:t>
             </a:r>
+            <a:endParaRPr lang="en-US" smtClean="0"/>
           </a:p>
           <a:p>
             <a:pPr lvl="4"/>
@@ -1359,7 +1361,6 @@
           <a:p>
             <a:fld id="{5BCAD085-E8A6-8845-BD4E-CB4CCA059FC4}" type="datetimeFigureOut">
               <a:rPr lang="en-US" smtClean="0"/>
-              <a:t>1/27/13</a:t>
             </a:fld>
             <a:endParaRPr lang="en-US"/>
           </a:p>
@@ -1401,18 +1402,12 @@
           <a:p>
             <a:fld id="{C1FF6DA9-008F-8B48-92A6-B652298478BF}" type="slidenum">
               <a:rPr lang="en-US" smtClean="0"/>
-              <a:t>‹#›</a:t>
             </a:fld>
             <a:endParaRPr lang="en-US"/>
           </a:p>
         </p:txBody>
       </p:sp>
     </p:spTree>
-    <p:extLst>
-      <p:ext uri="{BB962C8B-B14F-4D97-AF65-F5344CB8AC3E}">
-        <p14:creationId xmlns:p14="http://schemas.microsoft.com/office/powerpoint/2010/main" val="2782244947"/>
-      </p:ext>
-    </p:extLst>
   </p:cSld>
   <p:clrMapOvr>
     <a:masterClrMapping/>
@@ -1526,6 +1521,7 @@
               <a:rPr lang="en-US" smtClean="0"/>
               <a:t>Click to edit Master text styles</a:t>
             </a:r>
+            <a:endParaRPr lang="en-US" smtClean="0"/>
           </a:p>
         </p:txBody>
       </p:sp>
@@ -1582,6 +1578,7 @@
               <a:rPr lang="en-US" smtClean="0"/>
               <a:t>Click to edit Master text styles</a:t>
             </a:r>
+            <a:endParaRPr lang="en-US" smtClean="0"/>
           </a:p>
           <a:p>
             <a:pPr lvl="1"/>
@@ -1589,6 +1586,7 @@
               <a:rPr lang="en-US" smtClean="0"/>
               <a:t>Second level</a:t>
             </a:r>
+            <a:endParaRPr lang="en-US" smtClean="0"/>
           </a:p>
           <a:p>
             <a:pPr lvl="2"/>
@@ -1596,6 +1594,7 @@
               <a:rPr lang="en-US" smtClean="0"/>
               <a:t>Third level</a:t>
             </a:r>
+            <a:endParaRPr lang="en-US" smtClean="0"/>
           </a:p>
           <a:p>
             <a:pPr lvl="3"/>
@@ -1603,6 +1602,7 @@
               <a:rPr lang="en-US" smtClean="0"/>
               <a:t>Fourth level</a:t>
             </a:r>
+            <a:endParaRPr lang="en-US" smtClean="0"/>
           </a:p>
           <a:p>
             <a:pPr lvl="4"/>
@@ -1676,6 +1676,7 @@
               <a:rPr lang="en-US" smtClean="0"/>
               <a:t>Click to edit Master text styles</a:t>
             </a:r>
+            <a:endParaRPr lang="en-US" smtClean="0"/>
           </a:p>
         </p:txBody>
       </p:sp>
@@ -1732,6 +1733,7 @@
               <a:rPr lang="en-US" smtClean="0"/>
               <a:t>Click to edit Master text styles</a:t>
             </a:r>
+            <a:endParaRPr lang="en-US" smtClean="0"/>
           </a:p>
           <a:p>
             <a:pPr lvl="1"/>
@@ -1739,6 +1741,7 @@
               <a:rPr lang="en-US" smtClean="0"/>
               <a:t>Second level</a:t>
             </a:r>
+            <a:endParaRPr lang="en-US" smtClean="0"/>
           </a:p>
           <a:p>
             <a:pPr lvl="2"/>
@@ -1746,6 +1749,7 @@
               <a:rPr lang="en-US" smtClean="0"/>
               <a:t>Third level</a:t>
             </a:r>
+            <a:endParaRPr lang="en-US" smtClean="0"/>
           </a:p>
           <a:p>
             <a:pPr lvl="3"/>
@@ -1753,6 +1757,7 @@
               <a:rPr lang="en-US" smtClean="0"/>
               <a:t>Fourth level</a:t>
             </a:r>
+            <a:endParaRPr lang="en-US" smtClean="0"/>
           </a:p>
           <a:p>
             <a:pPr lvl="4"/>
@@ -1781,7 +1786,6 @@
           <a:p>
             <a:fld id="{5BCAD085-E8A6-8845-BD4E-CB4CCA059FC4}" type="datetimeFigureOut">
               <a:rPr lang="en-US" smtClean="0"/>
-              <a:t>1/27/13</a:t>
             </a:fld>
             <a:endParaRPr lang="en-US"/>
           </a:p>
@@ -1823,18 +1827,12 @@
           <a:p>
             <a:fld id="{C1FF6DA9-008F-8B48-92A6-B652298478BF}" type="slidenum">
               <a:rPr lang="en-US" smtClean="0"/>
-              <a:t>‹#›</a:t>
             </a:fld>
             <a:endParaRPr lang="en-US"/>
           </a:p>
         </p:txBody>
       </p:sp>
     </p:spTree>
-    <p:extLst>
-      <p:ext uri="{BB962C8B-B14F-4D97-AF65-F5344CB8AC3E}">
-        <p14:creationId xmlns:p14="http://schemas.microsoft.com/office/powerpoint/2010/main" val="990158736"/>
-      </p:ext>
-    </p:extLst>
   </p:cSld>
   <p:clrMapOvr>
     <a:masterClrMapping/>
@@ -1899,7 +1897,6 @@
           <a:p>
             <a:fld id="{5BCAD085-E8A6-8845-BD4E-CB4CCA059FC4}" type="datetimeFigureOut">
               <a:rPr lang="en-US" smtClean="0"/>
-              <a:t>1/27/13</a:t>
             </a:fld>
             <a:endParaRPr lang="en-US"/>
           </a:p>
@@ -1941,18 +1938,12 @@
           <a:p>
             <a:fld id="{C1FF6DA9-008F-8B48-92A6-B652298478BF}" type="slidenum">
               <a:rPr lang="en-US" smtClean="0"/>
-              <a:t>‹#›</a:t>
             </a:fld>
             <a:endParaRPr lang="en-US"/>
           </a:p>
         </p:txBody>
       </p:sp>
     </p:spTree>
-    <p:extLst>
-      <p:ext uri="{BB962C8B-B14F-4D97-AF65-F5344CB8AC3E}">
-        <p14:creationId xmlns:p14="http://schemas.microsoft.com/office/powerpoint/2010/main" val="727027711"/>
-      </p:ext>
-    </p:extLst>
   </p:cSld>
   <p:clrMapOvr>
     <a:masterClrMapping/>
@@ -1994,7 +1985,6 @@
           <a:p>
             <a:fld id="{5BCAD085-E8A6-8845-BD4E-CB4CCA059FC4}" type="datetimeFigureOut">
               <a:rPr lang="en-US" smtClean="0"/>
-              <a:t>1/27/13</a:t>
             </a:fld>
             <a:endParaRPr lang="en-US"/>
           </a:p>
@@ -2036,18 +2026,12 @@
           <a:p>
             <a:fld id="{C1FF6DA9-008F-8B48-92A6-B652298478BF}" type="slidenum">
               <a:rPr lang="en-US" smtClean="0"/>
-              <a:t>‹#›</a:t>
             </a:fld>
             <a:endParaRPr lang="en-US"/>
           </a:p>
         </p:txBody>
       </p:sp>
     </p:spTree>
-    <p:extLst>
-      <p:ext uri="{BB962C8B-B14F-4D97-AF65-F5344CB8AC3E}">
-        <p14:creationId xmlns:p14="http://schemas.microsoft.com/office/powerpoint/2010/main" val="1212999818"/>
-      </p:ext>
-    </p:extLst>
   </p:cSld>
   <p:clrMapOvr>
     <a:masterClrMapping/>
@@ -2157,6 +2141,7 @@
               <a:rPr lang="en-US" smtClean="0"/>
               <a:t>Click to edit Master text styles</a:t>
             </a:r>
+            <a:endParaRPr lang="en-US" smtClean="0"/>
           </a:p>
           <a:p>
             <a:pPr lvl="1"/>
@@ -2164,6 +2149,7 @@
               <a:rPr lang="en-US" smtClean="0"/>
               <a:t>Second level</a:t>
             </a:r>
+            <a:endParaRPr lang="en-US" smtClean="0"/>
           </a:p>
           <a:p>
             <a:pPr lvl="2"/>
@@ -2171,6 +2157,7 @@
               <a:rPr lang="en-US" smtClean="0"/>
               <a:t>Third level</a:t>
             </a:r>
+            <a:endParaRPr lang="en-US" smtClean="0"/>
           </a:p>
           <a:p>
             <a:pPr lvl="3"/>
@@ -2178,6 +2165,7 @@
               <a:rPr lang="en-US" smtClean="0"/>
               <a:t>Fourth level</a:t>
             </a:r>
+            <a:endParaRPr lang="en-US" smtClean="0"/>
           </a:p>
           <a:p>
             <a:pPr lvl="4"/>
@@ -2251,6 +2239,7 @@
               <a:rPr lang="en-US" smtClean="0"/>
               <a:t>Click to edit Master text styles</a:t>
             </a:r>
+            <a:endParaRPr lang="en-US" smtClean="0"/>
           </a:p>
         </p:txBody>
       </p:sp>
@@ -2271,7 +2260,6 @@
           <a:p>
             <a:fld id="{5BCAD085-E8A6-8845-BD4E-CB4CCA059FC4}" type="datetimeFigureOut">
               <a:rPr lang="en-US" smtClean="0"/>
-              <a:t>1/27/13</a:t>
             </a:fld>
             <a:endParaRPr lang="en-US"/>
           </a:p>
@@ -2313,18 +2301,12 @@
           <a:p>
             <a:fld id="{C1FF6DA9-008F-8B48-92A6-B652298478BF}" type="slidenum">
               <a:rPr lang="en-US" smtClean="0"/>
-              <a:t>‹#›</a:t>
             </a:fld>
             <a:endParaRPr lang="en-US"/>
           </a:p>
         </p:txBody>
       </p:sp>
     </p:spTree>
-    <p:extLst>
-      <p:ext uri="{BB962C8B-B14F-4D97-AF65-F5344CB8AC3E}">
-        <p14:creationId xmlns:p14="http://schemas.microsoft.com/office/powerpoint/2010/main" val="1840726560"/>
-      </p:ext>
-    </p:extLst>
   </p:cSld>
   <p:clrMapOvr>
     <a:masterClrMapping/>
@@ -2504,6 +2486,7 @@
               <a:rPr lang="en-US" smtClean="0"/>
               <a:t>Click to edit Master text styles</a:t>
             </a:r>
+            <a:endParaRPr lang="en-US" smtClean="0"/>
           </a:p>
         </p:txBody>
       </p:sp>
@@ -2524,7 +2507,6 @@
           <a:p>
             <a:fld id="{5BCAD085-E8A6-8845-BD4E-CB4CCA059FC4}" type="datetimeFigureOut">
               <a:rPr lang="en-US" smtClean="0"/>
-              <a:t>1/27/13</a:t>
             </a:fld>
             <a:endParaRPr lang="en-US"/>
           </a:p>
@@ -2566,18 +2548,12 @@
           <a:p>
             <a:fld id="{C1FF6DA9-008F-8B48-92A6-B652298478BF}" type="slidenum">
               <a:rPr lang="en-US" smtClean="0"/>
-              <a:t>‹#›</a:t>
             </a:fld>
             <a:endParaRPr lang="en-US"/>
           </a:p>
         </p:txBody>
       </p:sp>
     </p:spTree>
-    <p:extLst>
-      <p:ext uri="{BB962C8B-B14F-4D97-AF65-F5344CB8AC3E}">
-        <p14:creationId xmlns:p14="http://schemas.microsoft.com/office/powerpoint/2010/main" val="3889236939"/>
-      </p:ext>
-    </p:extLst>
   </p:cSld>
   <p:clrMapOvr>
     <a:masterClrMapping/>
@@ -2670,6 +2646,7 @@
               <a:rPr lang="en-US" smtClean="0"/>
               <a:t>Click to edit Master text styles</a:t>
             </a:r>
+            <a:endParaRPr lang="en-US" smtClean="0"/>
           </a:p>
           <a:p>
             <a:pPr lvl="1"/>
@@ -2677,6 +2654,7 @@
               <a:rPr lang="en-US" smtClean="0"/>
               <a:t>Second level</a:t>
             </a:r>
+            <a:endParaRPr lang="en-US" smtClean="0"/>
           </a:p>
           <a:p>
             <a:pPr lvl="2"/>
@@ -2684,6 +2662,7 @@
               <a:rPr lang="en-US" smtClean="0"/>
               <a:t>Third level</a:t>
             </a:r>
+            <a:endParaRPr lang="en-US" smtClean="0"/>
           </a:p>
           <a:p>
             <a:pPr lvl="3"/>
@@ -2691,6 +2670,7 @@
               <a:rPr lang="en-US" smtClean="0"/>
               <a:t>Fourth level</a:t>
             </a:r>
+            <a:endParaRPr lang="en-US" smtClean="0"/>
           </a:p>
           <a:p>
             <a:pPr lvl="4"/>
@@ -2737,7 +2717,6 @@
           <a:p>
             <a:fld id="{5BCAD085-E8A6-8845-BD4E-CB4CCA059FC4}" type="datetimeFigureOut">
               <a:rPr lang="en-US" smtClean="0"/>
-              <a:t>1/27/13</a:t>
             </a:fld>
             <a:endParaRPr lang="en-US"/>
           </a:p>
@@ -2815,18 +2794,12 @@
           <a:p>
             <a:fld id="{C1FF6DA9-008F-8B48-92A6-B652298478BF}" type="slidenum">
               <a:rPr lang="en-US" smtClean="0"/>
-              <a:t>‹#›</a:t>
             </a:fld>
             <a:endParaRPr lang="en-US"/>
           </a:p>
         </p:txBody>
       </p:sp>
     </p:spTree>
-    <p:extLst>
-      <p:ext uri="{BB962C8B-B14F-4D97-AF65-F5344CB8AC3E}">
-        <p14:creationId xmlns:p14="http://schemas.microsoft.com/office/powerpoint/2010/main" val="2209977519"/>
-      </p:ext>
-    </p:extLst>
   </p:cSld>
   <p:clrMap bg1="lt1" tx1="dk1" bg2="lt2" tx2="dk2" accent1="accent1" accent2="accent2" accent3="accent3" accent4="accent4" accent5="accent5" accent6="accent6" hlink="hlink" folHlink="folHlink"/>
   <p:sldLayoutIdLst>
@@ -2864,7 +2837,7 @@
         <a:spcBef>
           <a:spcPct val="20000"/>
         </a:spcBef>
-        <a:buFont typeface="Arial"/>
+        <a:buFont typeface="Arial" panose="020B0604020202020204"/>
         <a:buChar char="•"/>
         <a:defRPr sz="3200" kern="1200">
           <a:solidFill>
@@ -2879,7 +2852,7 @@
         <a:spcBef>
           <a:spcPct val="20000"/>
         </a:spcBef>
-        <a:buFont typeface="Arial"/>
+        <a:buFont typeface="Arial" panose="020B0604020202020204"/>
         <a:buChar char="–"/>
         <a:defRPr sz="2800" kern="1200">
           <a:solidFill>
@@ -2894,7 +2867,7 @@
         <a:spcBef>
           <a:spcPct val="20000"/>
         </a:spcBef>
-        <a:buFont typeface="Arial"/>
+        <a:buFont typeface="Arial" panose="020B0604020202020204"/>
         <a:buChar char="•"/>
         <a:defRPr sz="2400" kern="1200">
           <a:solidFill>
@@ -2909,7 +2882,7 @@
         <a:spcBef>
           <a:spcPct val="20000"/>
         </a:spcBef>
-        <a:buFont typeface="Arial"/>
+        <a:buFont typeface="Arial" panose="020B0604020202020204"/>
         <a:buChar char="–"/>
         <a:defRPr sz="2000" kern="1200">
           <a:solidFill>
@@ -2924,7 +2897,7 @@
         <a:spcBef>
           <a:spcPct val="20000"/>
         </a:spcBef>
-        <a:buFont typeface="Arial"/>
+        <a:buFont typeface="Arial" panose="020B0604020202020204"/>
         <a:buChar char="»"/>
         <a:defRPr sz="2000" kern="1200">
           <a:solidFill>
@@ -2939,7 +2912,7 @@
         <a:spcBef>
           <a:spcPct val="20000"/>
         </a:spcBef>
-        <a:buFont typeface="Arial"/>
+        <a:buFont typeface="Arial" panose="020B0604020202020204"/>
         <a:buChar char="•"/>
         <a:defRPr sz="2000" kern="1200">
           <a:solidFill>
@@ -2954,7 +2927,7 @@
         <a:spcBef>
           <a:spcPct val="20000"/>
         </a:spcBef>
-        <a:buFont typeface="Arial"/>
+        <a:buFont typeface="Arial" panose="020B0604020202020204"/>
         <a:buChar char="•"/>
         <a:defRPr sz="2000" kern="1200">
           <a:solidFill>
@@ -2969,7 +2942,7 @@
         <a:spcBef>
           <a:spcPct val="20000"/>
         </a:spcBef>
-        <a:buFont typeface="Arial"/>
+        <a:buFont typeface="Arial" panose="020B0604020202020204"/>
         <a:buChar char="•"/>
         <a:defRPr sz="2000" kern="1200">
           <a:solidFill>
@@ -2984,7 +2957,7 @@
         <a:spcBef>
           <a:spcPct val="20000"/>
         </a:spcBef>
-        <a:buFont typeface="Arial"/>
+        <a:buFont typeface="Arial" panose="020B0604020202020204"/>
         <a:buChar char="•"/>
         <a:defRPr sz="2000" kern="1200">
           <a:solidFill>
@@ -3096,7 +3069,7 @@
 </file>
 
 <file path=ppt/slides/slide1.xml><?xml version="1.0" encoding="utf-8"?>
-<p:sld xmlns:a="http://schemas.openxmlformats.org/drawingml/2006/main" xmlns:p="http://schemas.openxmlformats.org/presentationml/2006/main" xmlns:r="http://schemas.openxmlformats.org/officeDocument/2006/relationships">
+<p:sld xmlns:a="http://schemas.openxmlformats.org/drawingml/2006/main" xmlns:r="http://schemas.openxmlformats.org/officeDocument/2006/relationships" xmlns:p="http://schemas.openxmlformats.org/presentationml/2006/main">
   <p:cSld>
     <p:bg>
       <p:bgPr>
@@ -3183,7 +3156,7 @@
                 <a:solidFill>
                   <a:srgbClr val="FFFFFF"/>
                 </a:solidFill>
-                <a:latin typeface="Microsoft YaHei"/>
+                <a:latin typeface="微软雅黑" panose="020B0503020204020204" charset="-122"/>
               </a:defRPr>
             </a:pPr>
             <a:r>
@@ -3262,7 +3235,7 @@
                 <a:solidFill>
                   <a:srgbClr val="3498DB"/>
                 </a:solidFill>
-                <a:latin typeface="Microsoft YaHei"/>
+                <a:latin typeface="微软雅黑" panose="020B0503020204020204" charset="-122"/>
               </a:defRPr>
             </a:pPr>
             <a:r>
@@ -3298,7 +3271,7 @@
                 <a:solidFill>
                   <a:srgbClr val="99BBCC"/>
                 </a:solidFill>
-                <a:latin typeface="Microsoft YaHei"/>
+                <a:latin typeface="微软雅黑" panose="020B0503020204020204" charset="-122"/>
               </a:defRPr>
             </a:pPr>
             <a:r>
@@ -3380,7 +3353,7 @@
                 <a:solidFill>
                   <a:srgbClr val="BBCCDD"/>
                 </a:solidFill>
-                <a:latin typeface="Microsoft YaHei"/>
+                <a:latin typeface="微软雅黑" panose="020B0503020204020204" charset="-122"/>
               </a:defRPr>
             </a:pPr>
             <a:r>
@@ -3396,7 +3369,7 @@
                 <a:solidFill>
                   <a:srgbClr val="BBCCDD"/>
                 </a:solidFill>
-                <a:latin typeface="Microsoft YaHei"/>
+                <a:latin typeface="微软雅黑" panose="020B0503020204020204" charset="-122"/>
               </a:defRPr>
             </a:pPr>
             <a:r>
@@ -3412,7 +3385,7 @@
                 <a:solidFill>
                   <a:srgbClr val="BBCCDD"/>
                 </a:solidFill>
-                <a:latin typeface="Microsoft YaHei"/>
+                <a:latin typeface="微软雅黑" panose="020B0503020204020204" charset="-122"/>
               </a:defRPr>
             </a:pPr>
             <a:r>
@@ -3448,7 +3421,7 @@
                 <a:solidFill>
                   <a:srgbClr val="8899AA"/>
                 </a:solidFill>
-                <a:latin typeface="Microsoft YaHei"/>
+                <a:latin typeface="微软雅黑" panose="020B0503020204020204" charset="-122"/>
               </a:defRPr>
             </a:pPr>
             <a:r>
@@ -3544,7 +3517,7 @@
 </file>
 
 <file path=ppt/slides/slide10.xml><?xml version="1.0" encoding="utf-8"?>
-<p:sld xmlns:a="http://schemas.openxmlformats.org/drawingml/2006/main" xmlns:p="http://schemas.openxmlformats.org/presentationml/2006/main" xmlns:r="http://schemas.openxmlformats.org/officeDocument/2006/relationships">
+<p:sld xmlns:a="http://schemas.openxmlformats.org/drawingml/2006/main" xmlns:r="http://schemas.openxmlformats.org/officeDocument/2006/relationships" xmlns:p="http://schemas.openxmlformats.org/presentationml/2006/main">
   <p:cSld>
     <p:bg>
       <p:bgPr>
@@ -3752,7 +3725,7 @@
                 <a:solidFill>
                   <a:srgbClr val="FFFFFF"/>
                 </a:solidFill>
-                <a:latin typeface="Microsoft YaHei"/>
+                <a:latin typeface="微软雅黑" panose="020B0503020204020204" charset="-122"/>
               </a:defRPr>
             </a:pPr>
             <a:r>
@@ -3788,7 +3761,7 @@
                 <a:solidFill>
                   <a:srgbClr val="EEEEEE"/>
                 </a:solidFill>
-                <a:latin typeface="Microsoft YaHei"/>
+                <a:latin typeface="微软雅黑" panose="020B0503020204020204" charset="-122"/>
               </a:defRPr>
             </a:pPr>
             <a:r>
@@ -3871,7 +3844,7 @@
                 <a:solidFill>
                   <a:srgbClr val="FFFFFF"/>
                 </a:solidFill>
-                <a:latin typeface="Microsoft YaHei"/>
+                <a:latin typeface="微软雅黑" panose="020B0503020204020204" charset="-122"/>
               </a:defRPr>
             </a:pPr>
             <a:r>
@@ -3907,7 +3880,7 @@
                 <a:solidFill>
                   <a:srgbClr val="EEEEEE"/>
                 </a:solidFill>
-                <a:latin typeface="Microsoft YaHei"/>
+                <a:latin typeface="微软雅黑" panose="020B0503020204020204" charset="-122"/>
               </a:defRPr>
             </a:pPr>
             <a:r>
@@ -3990,7 +3963,7 @@
                 <a:solidFill>
                   <a:srgbClr val="FFFFFF"/>
                 </a:solidFill>
-                <a:latin typeface="Microsoft YaHei"/>
+                <a:latin typeface="微软雅黑" panose="020B0503020204020204" charset="-122"/>
               </a:defRPr>
             </a:pPr>
             <a:r>
@@ -4026,7 +3999,7 @@
                 <a:solidFill>
                   <a:srgbClr val="EEEEEE"/>
                 </a:solidFill>
-                <a:latin typeface="Microsoft YaHei"/>
+                <a:latin typeface="微软雅黑" panose="020B0503020204020204" charset="-122"/>
               </a:defRPr>
             </a:pPr>
             <a:r>
@@ -4109,7 +4082,7 @@
                 <a:solidFill>
                   <a:srgbClr val="FFFFFF"/>
                 </a:solidFill>
-                <a:latin typeface="Microsoft YaHei"/>
+                <a:latin typeface="微软雅黑" panose="020B0503020204020204" charset="-122"/>
               </a:defRPr>
             </a:pPr>
             <a:r>
@@ -4145,7 +4118,7 @@
                 <a:solidFill>
                   <a:srgbClr val="EEEEEE"/>
                 </a:solidFill>
-                <a:latin typeface="Microsoft YaHei"/>
+                <a:latin typeface="微软雅黑" panose="020B0503020204020204" charset="-122"/>
               </a:defRPr>
             </a:pPr>
             <a:r>
@@ -4310,7 +4283,7 @@
                 <a:solidFill>
                   <a:srgbClr val="2C3E50"/>
                 </a:solidFill>
-                <a:latin typeface="Microsoft YaHei"/>
+                <a:latin typeface="微软雅黑" panose="020B0503020204020204" charset="-122"/>
               </a:defRPr>
             </a:pPr>
             <a:r>
@@ -4391,7 +4364,7 @@
                 <a:solidFill>
                   <a:srgbClr val="3498DB"/>
                 </a:solidFill>
-                <a:latin typeface="Microsoft YaHei"/>
+                <a:latin typeface="微软雅黑" panose="020B0503020204020204" charset="-122"/>
               </a:defRPr>
             </a:pPr>
             <a:r>
@@ -4427,7 +4400,7 @@
                 <a:solidFill>
                   <a:srgbClr val="555555"/>
                 </a:solidFill>
-                <a:latin typeface="Microsoft YaHei"/>
+                <a:latin typeface="微软雅黑" panose="020B0503020204020204" charset="-122"/>
               </a:defRPr>
             </a:pPr>
             <a:r>
@@ -4508,7 +4481,7 @@
                 <a:solidFill>
                   <a:srgbClr val="3498DB"/>
                 </a:solidFill>
-                <a:latin typeface="Microsoft YaHei"/>
+                <a:latin typeface="微软雅黑" panose="020B0503020204020204" charset="-122"/>
               </a:defRPr>
             </a:pPr>
             <a:r>
@@ -4544,7 +4517,7 @@
                 <a:solidFill>
                   <a:srgbClr val="555555"/>
                 </a:solidFill>
-                <a:latin typeface="Microsoft YaHei"/>
+                <a:latin typeface="微软雅黑" panose="020B0503020204020204" charset="-122"/>
               </a:defRPr>
             </a:pPr>
             <a:r>
@@ -4625,7 +4598,7 @@
                 <a:solidFill>
                   <a:srgbClr val="3498DB"/>
                 </a:solidFill>
-                <a:latin typeface="Microsoft YaHei"/>
+                <a:latin typeface="微软雅黑" panose="020B0503020204020204" charset="-122"/>
               </a:defRPr>
             </a:pPr>
             <a:r>
@@ -4661,7 +4634,7 @@
                 <a:solidFill>
                   <a:srgbClr val="555555"/>
                 </a:solidFill>
-                <a:latin typeface="Microsoft YaHei"/>
+                <a:latin typeface="微软雅黑" panose="020B0503020204020204" charset="-122"/>
               </a:defRPr>
             </a:pPr>
             <a:r>
@@ -4742,7 +4715,7 @@
                 <a:solidFill>
                   <a:srgbClr val="3498DB"/>
                 </a:solidFill>
-                <a:latin typeface="Microsoft YaHei"/>
+                <a:latin typeface="微软雅黑" panose="020B0503020204020204" charset="-122"/>
               </a:defRPr>
             </a:pPr>
             <a:r>
@@ -4778,7 +4751,7 @@
                 <a:solidFill>
                   <a:srgbClr val="555555"/>
                 </a:solidFill>
-                <a:latin typeface="Microsoft YaHei"/>
+                <a:latin typeface="微软雅黑" panose="020B0503020204020204" charset="-122"/>
               </a:defRPr>
             </a:pPr>
             <a:r>
@@ -4859,7 +4832,7 @@
                 <a:solidFill>
                   <a:srgbClr val="3498DB"/>
                 </a:solidFill>
-                <a:latin typeface="Microsoft YaHei"/>
+                <a:latin typeface="微软雅黑" panose="020B0503020204020204" charset="-122"/>
               </a:defRPr>
             </a:pPr>
             <a:r>
@@ -4895,7 +4868,7 @@
                 <a:solidFill>
                   <a:srgbClr val="555555"/>
                 </a:solidFill>
-                <a:latin typeface="Microsoft YaHei"/>
+                <a:latin typeface="微软雅黑" panose="020B0503020204020204" charset="-122"/>
               </a:defRPr>
             </a:pPr>
             <a:r>
@@ -4976,7 +4949,7 @@
                 <a:solidFill>
                   <a:srgbClr val="3498DB"/>
                 </a:solidFill>
-                <a:latin typeface="Microsoft YaHei"/>
+                <a:latin typeface="微软雅黑" panose="020B0503020204020204" charset="-122"/>
               </a:defRPr>
             </a:pPr>
             <a:r>
@@ -5012,7 +4985,7 @@
                 <a:solidFill>
                   <a:srgbClr val="555555"/>
                 </a:solidFill>
-                <a:latin typeface="Microsoft YaHei"/>
+                <a:latin typeface="微软雅黑" panose="020B0503020204020204" charset="-122"/>
               </a:defRPr>
             </a:pPr>
             <a:r>
@@ -5108,7 +5081,7 @@
 </file>
 
 <file path=ppt/slides/slide11.xml><?xml version="1.0" encoding="utf-8"?>
-<p:sld xmlns:a="http://schemas.openxmlformats.org/drawingml/2006/main" xmlns:p="http://schemas.openxmlformats.org/presentationml/2006/main" xmlns:r="http://schemas.openxmlformats.org/officeDocument/2006/relationships">
+<p:sld xmlns:a="http://schemas.openxmlformats.org/drawingml/2006/main" xmlns:r="http://schemas.openxmlformats.org/officeDocument/2006/relationships" xmlns:p="http://schemas.openxmlformats.org/presentationml/2006/main">
   <p:cSld>
     <p:bg>
       <p:bgPr>
@@ -5500,7 +5473,7 @@
           </a:fontRef>
         </p:style>
         <p:txBody>
-          <a:bodyPr rtlCol="0" anchor="ctr" wrap="square"/>
+          <a:bodyPr wrap="square" rtlCol="0" anchor="ctr"/>
           <a:lstStyle/>
           <a:p>
             <a:pPr algn="ctr">
@@ -5508,7 +5481,7 @@
                 <a:solidFill>
                   <a:srgbClr val="000000"/>
                 </a:solidFill>
-                <a:latin typeface="Microsoft YaHei"/>
+                <a:latin typeface="微软雅黑" panose="020B0503020204020204" charset="-122"/>
               </a:defRPr>
             </a:pPr>
             <a:r>
@@ -5555,7 +5528,7 @@
           </a:fontRef>
         </p:style>
         <p:txBody>
-          <a:bodyPr rtlCol="0" anchor="ctr" wrap="square"/>
+          <a:bodyPr wrap="square" rtlCol="0" anchor="ctr"/>
           <a:lstStyle/>
           <a:p>
             <a:pPr algn="l">
@@ -5563,7 +5536,7 @@
                 <a:solidFill>
                   <a:srgbClr val="000000"/>
                 </a:solidFill>
-                <a:latin typeface="Microsoft YaHei"/>
+                <a:latin typeface="微软雅黑" panose="020B0503020204020204" charset="-122"/>
               </a:defRPr>
             </a:pPr>
             <a:r>
@@ -5610,7 +5583,7 @@
           </a:fontRef>
         </p:style>
         <p:txBody>
-          <a:bodyPr rtlCol="0" anchor="ctr" wrap="square"/>
+          <a:bodyPr wrap="square" rtlCol="0" anchor="ctr"/>
           <a:lstStyle/>
           <a:p>
             <a:pPr algn="ctr">
@@ -5618,7 +5591,7 @@
                 <a:solidFill>
                   <a:srgbClr val="000000"/>
                 </a:solidFill>
-                <a:latin typeface="Microsoft YaHei"/>
+                <a:latin typeface="微软雅黑" panose="020B0503020204020204" charset="-122"/>
               </a:defRPr>
             </a:pPr>
             <a:r>
@@ -5665,7 +5638,7 @@
           </a:fontRef>
         </p:style>
         <p:txBody>
-          <a:bodyPr rtlCol="0" anchor="ctr" wrap="square"/>
+          <a:bodyPr wrap="square" rtlCol="0" anchor="ctr"/>
           <a:lstStyle/>
           <a:p>
             <a:pPr algn="ctr">
@@ -5673,7 +5646,7 @@
                 <a:solidFill>
                   <a:srgbClr val="000000"/>
                 </a:solidFill>
-                <a:latin typeface="Microsoft YaHei"/>
+                <a:latin typeface="微软雅黑" panose="020B0503020204020204" charset="-122"/>
               </a:defRPr>
             </a:pPr>
             <a:r>
@@ -5720,7 +5693,7 @@
           </a:fontRef>
         </p:style>
         <p:txBody>
-          <a:bodyPr rtlCol="0" anchor="ctr" wrap="square"/>
+          <a:bodyPr wrap="square" rtlCol="0" anchor="ctr"/>
           <a:lstStyle/>
           <a:p>
             <a:pPr algn="ctr">
@@ -5728,7 +5701,7 @@
                 <a:solidFill>
                   <a:srgbClr val="000000"/>
                 </a:solidFill>
-                <a:latin typeface="Microsoft YaHei"/>
+                <a:latin typeface="微软雅黑" panose="020B0503020204020204" charset="-122"/>
               </a:defRPr>
             </a:pPr>
             <a:r>
@@ -5775,7 +5748,7 @@
           </a:fontRef>
         </p:style>
         <p:txBody>
-          <a:bodyPr rtlCol="0" anchor="ctr" wrap="square"/>
+          <a:bodyPr wrap="square" rtlCol="0" anchor="ctr"/>
           <a:lstStyle/>
           <a:p>
             <a:pPr algn="l">
@@ -5783,7 +5756,7 @@
                 <a:solidFill>
                   <a:srgbClr val="000000"/>
                 </a:solidFill>
-                <a:latin typeface="Microsoft YaHei"/>
+                <a:latin typeface="微软雅黑" panose="020B0503020204020204" charset="-122"/>
               </a:defRPr>
             </a:pPr>
             <a:r>
@@ -5830,7 +5803,7 @@
           </a:fontRef>
         </p:style>
         <p:txBody>
-          <a:bodyPr rtlCol="0" anchor="ctr" wrap="square"/>
+          <a:bodyPr wrap="square" rtlCol="0" anchor="ctr"/>
           <a:lstStyle/>
           <a:p>
             <a:pPr algn="ctr">
@@ -5838,7 +5811,7 @@
                 <a:solidFill>
                   <a:srgbClr val="000000"/>
                 </a:solidFill>
-                <a:latin typeface="Microsoft YaHei"/>
+                <a:latin typeface="微软雅黑" panose="020B0503020204020204" charset="-122"/>
               </a:defRPr>
             </a:pPr>
             <a:r>
@@ -5885,7 +5858,7 @@
           </a:fontRef>
         </p:style>
         <p:txBody>
-          <a:bodyPr rtlCol="0" anchor="ctr" wrap="square"/>
+          <a:bodyPr wrap="square" rtlCol="0" anchor="ctr"/>
           <a:lstStyle/>
           <a:p>
             <a:pPr algn="ctr">
@@ -5893,7 +5866,7 @@
                 <a:solidFill>
                   <a:srgbClr val="000000"/>
                 </a:solidFill>
-                <a:latin typeface="Microsoft YaHei"/>
+                <a:latin typeface="微软雅黑" panose="020B0503020204020204" charset="-122"/>
               </a:defRPr>
             </a:pPr>
             <a:r>
@@ -5940,7 +5913,7 @@
           </a:fontRef>
         </p:style>
         <p:txBody>
-          <a:bodyPr rtlCol="0" anchor="ctr" wrap="square"/>
+          <a:bodyPr wrap="square" rtlCol="0" anchor="ctr"/>
           <a:lstStyle/>
           <a:p>
             <a:pPr algn="ctr">
@@ -5948,7 +5921,7 @@
                 <a:solidFill>
                   <a:srgbClr val="000000"/>
                 </a:solidFill>
-                <a:latin typeface="Microsoft YaHei"/>
+                <a:latin typeface="微软雅黑" panose="020B0503020204020204" charset="-122"/>
               </a:defRPr>
             </a:pPr>
             <a:r>
@@ -5995,7 +5968,7 @@
           </a:fontRef>
         </p:style>
         <p:txBody>
-          <a:bodyPr rtlCol="0" anchor="ctr" wrap="square"/>
+          <a:bodyPr wrap="square" rtlCol="0" anchor="ctr"/>
           <a:lstStyle/>
           <a:p>
             <a:pPr algn="l">
@@ -6003,7 +5976,7 @@
                 <a:solidFill>
                   <a:srgbClr val="000000"/>
                 </a:solidFill>
-                <a:latin typeface="Microsoft YaHei"/>
+                <a:latin typeface="微软雅黑" panose="020B0503020204020204" charset="-122"/>
               </a:defRPr>
             </a:pPr>
             <a:r>
@@ -6050,7 +6023,7 @@
           </a:fontRef>
         </p:style>
         <p:txBody>
-          <a:bodyPr rtlCol="0" anchor="ctr" wrap="square"/>
+          <a:bodyPr wrap="square" rtlCol="0" anchor="ctr"/>
           <a:lstStyle/>
           <a:p>
             <a:pPr algn="ctr">
@@ -6058,7 +6031,7 @@
                 <a:solidFill>
                   <a:srgbClr val="000000"/>
                 </a:solidFill>
-                <a:latin typeface="Microsoft YaHei"/>
+                <a:latin typeface="微软雅黑" panose="020B0503020204020204" charset="-122"/>
               </a:defRPr>
             </a:pPr>
             <a:r>
@@ -6105,7 +6078,7 @@
           </a:fontRef>
         </p:style>
         <p:txBody>
-          <a:bodyPr rtlCol="0" anchor="ctr" wrap="square"/>
+          <a:bodyPr wrap="square" rtlCol="0" anchor="ctr"/>
           <a:lstStyle/>
           <a:p>
             <a:pPr algn="ctr">
@@ -6113,7 +6086,7 @@
                 <a:solidFill>
                   <a:srgbClr val="000000"/>
                 </a:solidFill>
-                <a:latin typeface="Microsoft YaHei"/>
+                <a:latin typeface="微软雅黑" panose="020B0503020204020204" charset="-122"/>
               </a:defRPr>
             </a:pPr>
             <a:r>
@@ -6160,7 +6133,7 @@
           </a:fontRef>
         </p:style>
         <p:txBody>
-          <a:bodyPr rtlCol="0" anchor="ctr" wrap="square"/>
+          <a:bodyPr wrap="square" rtlCol="0" anchor="ctr"/>
           <a:lstStyle/>
           <a:p>
             <a:pPr algn="ctr">
@@ -6168,7 +6141,7 @@
                 <a:solidFill>
                   <a:srgbClr val="000000"/>
                 </a:solidFill>
-                <a:latin typeface="Microsoft YaHei"/>
+                <a:latin typeface="微软雅黑" panose="020B0503020204020204" charset="-122"/>
               </a:defRPr>
             </a:pPr>
             <a:r>
@@ -6215,7 +6188,7 @@
           </a:fontRef>
         </p:style>
         <p:txBody>
-          <a:bodyPr rtlCol="0" anchor="ctr" wrap="square"/>
+          <a:bodyPr wrap="square" rtlCol="0" anchor="ctr"/>
           <a:lstStyle/>
           <a:p>
             <a:pPr algn="l">
@@ -6223,7 +6196,7 @@
                 <a:solidFill>
                   <a:srgbClr val="000000"/>
                 </a:solidFill>
-                <a:latin typeface="Microsoft YaHei"/>
+                <a:latin typeface="微软雅黑" panose="020B0503020204020204" charset="-122"/>
               </a:defRPr>
             </a:pPr>
             <a:r>
@@ -6274,7 +6247,7 @@
           </a:fontRef>
         </p:style>
         <p:txBody>
-          <a:bodyPr rtlCol="0" anchor="ctr" wrap="square"/>
+          <a:bodyPr wrap="square" rtlCol="0" anchor="ctr"/>
           <a:lstStyle/>
           <a:p>
             <a:pPr algn="ctr">
@@ -6282,7 +6255,7 @@
                 <a:solidFill>
                   <a:srgbClr val="000000"/>
                 </a:solidFill>
-                <a:latin typeface="Microsoft YaHei"/>
+                <a:latin typeface="微软雅黑" panose="020B0503020204020204" charset="-122"/>
               </a:defRPr>
             </a:pPr>
             <a:r>
@@ -6329,7 +6302,7 @@
           </a:fontRef>
         </p:style>
         <p:txBody>
-          <a:bodyPr rtlCol="0" anchor="ctr" wrap="square"/>
+          <a:bodyPr wrap="square" rtlCol="0" anchor="ctr"/>
           <a:lstStyle/>
           <a:p>
             <a:pPr algn="ctr">
@@ -6337,7 +6310,7 @@
                 <a:solidFill>
                   <a:srgbClr val="000000"/>
                 </a:solidFill>
-                <a:latin typeface="Microsoft YaHei"/>
+                <a:latin typeface="微软雅黑" panose="020B0503020204020204" charset="-122"/>
               </a:defRPr>
             </a:pPr>
             <a:r>
@@ -6384,7 +6357,7 @@
           </a:fontRef>
         </p:style>
         <p:txBody>
-          <a:bodyPr rtlCol="0" anchor="ctr" wrap="square"/>
+          <a:bodyPr wrap="square" rtlCol="0" anchor="ctr"/>
           <a:lstStyle/>
           <a:p>
             <a:pPr algn="ctr">
@@ -6392,7 +6365,7 @@
                 <a:solidFill>
                   <a:srgbClr val="000000"/>
                 </a:solidFill>
-                <a:latin typeface="Microsoft YaHei"/>
+                <a:latin typeface="微软雅黑" panose="020B0503020204020204" charset="-122"/>
               </a:defRPr>
             </a:pPr>
             <a:r>
@@ -6439,7 +6412,7 @@
           </a:fontRef>
         </p:style>
         <p:txBody>
-          <a:bodyPr rtlCol="0" anchor="ctr" wrap="square"/>
+          <a:bodyPr wrap="square" rtlCol="0" anchor="ctr"/>
           <a:lstStyle/>
           <a:p>
             <a:pPr algn="l">
@@ -6447,7 +6420,7 @@
                 <a:solidFill>
                   <a:srgbClr val="000000"/>
                 </a:solidFill>
-                <a:latin typeface="Microsoft YaHei"/>
+                <a:latin typeface="微软雅黑" panose="020B0503020204020204" charset="-122"/>
               </a:defRPr>
             </a:pPr>
             <a:r>
@@ -6498,7 +6471,7 @@
           </a:fontRef>
         </p:style>
         <p:txBody>
-          <a:bodyPr rtlCol="0" anchor="ctr" wrap="square"/>
+          <a:bodyPr wrap="square" rtlCol="0" anchor="ctr"/>
           <a:lstStyle/>
           <a:p>
             <a:pPr algn="ctr">
@@ -6506,7 +6479,7 @@
                 <a:solidFill>
                   <a:srgbClr val="000000"/>
                 </a:solidFill>
-                <a:latin typeface="Microsoft YaHei"/>
+                <a:latin typeface="微软雅黑" panose="020B0503020204020204" charset="-122"/>
               </a:defRPr>
             </a:pPr>
             <a:r>
@@ -6553,7 +6526,7 @@
           </a:fontRef>
         </p:style>
         <p:txBody>
-          <a:bodyPr rtlCol="0" anchor="ctr" wrap="square"/>
+          <a:bodyPr wrap="square" rtlCol="0" anchor="ctr"/>
           <a:lstStyle/>
           <a:p>
             <a:pPr algn="ctr">
@@ -6561,7 +6534,7 @@
                 <a:solidFill>
                   <a:srgbClr val="000000"/>
                 </a:solidFill>
-                <a:latin typeface="Microsoft YaHei"/>
+                <a:latin typeface="微软雅黑" panose="020B0503020204020204" charset="-122"/>
               </a:defRPr>
             </a:pPr>
             <a:r>
@@ -6608,7 +6581,7 @@
           </a:fontRef>
         </p:style>
         <p:txBody>
-          <a:bodyPr rtlCol="0" anchor="ctr" wrap="square"/>
+          <a:bodyPr wrap="square" rtlCol="0" anchor="ctr"/>
           <a:lstStyle/>
           <a:p>
             <a:pPr algn="ctr">
@@ -6616,7 +6589,7 @@
                 <a:solidFill>
                   <a:srgbClr val="000000"/>
                 </a:solidFill>
-                <a:latin typeface="Microsoft YaHei"/>
+                <a:latin typeface="微软雅黑" panose="020B0503020204020204" charset="-122"/>
               </a:defRPr>
             </a:pPr>
             <a:r>
@@ -6663,7 +6636,7 @@
           </a:fontRef>
         </p:style>
         <p:txBody>
-          <a:bodyPr rtlCol="0" anchor="ctr" wrap="square"/>
+          <a:bodyPr wrap="square" rtlCol="0" anchor="ctr"/>
           <a:lstStyle/>
           <a:p>
             <a:pPr algn="l">
@@ -6671,7 +6644,7 @@
                 <a:solidFill>
                   <a:srgbClr val="000000"/>
                 </a:solidFill>
-                <a:latin typeface="Microsoft YaHei"/>
+                <a:latin typeface="微软雅黑" panose="020B0503020204020204" charset="-122"/>
               </a:defRPr>
             </a:pPr>
             <a:r>
@@ -6722,7 +6695,7 @@
           </a:fontRef>
         </p:style>
         <p:txBody>
-          <a:bodyPr rtlCol="0" anchor="ctr" wrap="square"/>
+          <a:bodyPr wrap="square" rtlCol="0" anchor="ctr"/>
           <a:lstStyle/>
           <a:p>
             <a:pPr algn="ctr">
@@ -6730,7 +6703,7 @@
                 <a:solidFill>
                   <a:srgbClr val="000000"/>
                 </a:solidFill>
-                <a:latin typeface="Microsoft YaHei"/>
+                <a:latin typeface="微软雅黑" panose="020B0503020204020204" charset="-122"/>
               </a:defRPr>
             </a:pPr>
             <a:r>
@@ -6777,7 +6750,7 @@
           </a:fontRef>
         </p:style>
         <p:txBody>
-          <a:bodyPr rtlCol="0" anchor="ctr" wrap="square"/>
+          <a:bodyPr wrap="square" rtlCol="0" anchor="ctr"/>
           <a:lstStyle/>
           <a:p>
             <a:pPr algn="ctr">
@@ -6785,7 +6758,7 @@
                 <a:solidFill>
                   <a:srgbClr val="000000"/>
                 </a:solidFill>
-                <a:latin typeface="Microsoft YaHei"/>
+                <a:latin typeface="微软雅黑" panose="020B0503020204020204" charset="-122"/>
               </a:defRPr>
             </a:pPr>
             <a:r>
@@ -6832,7 +6805,7 @@
           </a:fontRef>
         </p:style>
         <p:txBody>
-          <a:bodyPr rtlCol="0" anchor="ctr" wrap="square"/>
+          <a:bodyPr wrap="square" rtlCol="0" anchor="ctr"/>
           <a:lstStyle/>
           <a:p>
             <a:pPr algn="ctr">
@@ -6840,7 +6813,7 @@
                 <a:solidFill>
                   <a:srgbClr val="000000"/>
                 </a:solidFill>
-                <a:latin typeface="Microsoft YaHei"/>
+                <a:latin typeface="微软雅黑" panose="020B0503020204020204" charset="-122"/>
               </a:defRPr>
             </a:pPr>
             <a:r>
@@ -6887,7 +6860,7 @@
           </a:fontRef>
         </p:style>
         <p:txBody>
-          <a:bodyPr rtlCol="0" anchor="ctr" wrap="square"/>
+          <a:bodyPr wrap="square" rtlCol="0" anchor="ctr"/>
           <a:lstStyle/>
           <a:p>
             <a:pPr algn="l">
@@ -6895,7 +6868,7 @@
                 <a:solidFill>
                   <a:srgbClr val="000000"/>
                 </a:solidFill>
-                <a:latin typeface="Microsoft YaHei"/>
+                <a:latin typeface="微软雅黑" panose="020B0503020204020204" charset="-122"/>
               </a:defRPr>
             </a:pPr>
             <a:r>
@@ -6946,7 +6919,7 @@
           </a:fontRef>
         </p:style>
         <p:txBody>
-          <a:bodyPr rtlCol="0" anchor="ctr" wrap="square"/>
+          <a:bodyPr wrap="square" rtlCol="0" anchor="ctr"/>
           <a:lstStyle/>
           <a:p>
             <a:pPr algn="ctr">
@@ -6954,7 +6927,7 @@
                 <a:solidFill>
                   <a:srgbClr val="000000"/>
                 </a:solidFill>
-                <a:latin typeface="Microsoft YaHei"/>
+                <a:latin typeface="微软雅黑" panose="020B0503020204020204" charset="-122"/>
               </a:defRPr>
             </a:pPr>
             <a:r>
@@ -7001,7 +6974,7 @@
           </a:fontRef>
         </p:style>
         <p:txBody>
-          <a:bodyPr rtlCol="0" anchor="ctr" wrap="square"/>
+          <a:bodyPr wrap="square" rtlCol="0" anchor="ctr"/>
           <a:lstStyle/>
           <a:p>
             <a:pPr algn="ctr">
@@ -7009,7 +6982,7 @@
                 <a:solidFill>
                   <a:srgbClr val="000000"/>
                 </a:solidFill>
-                <a:latin typeface="Microsoft YaHei"/>
+                <a:latin typeface="微软雅黑" panose="020B0503020204020204" charset="-122"/>
               </a:defRPr>
             </a:pPr>
             <a:r>
@@ -7056,7 +7029,7 @@
           </a:fontRef>
         </p:style>
         <p:txBody>
-          <a:bodyPr rtlCol="0" anchor="ctr" wrap="square"/>
+          <a:bodyPr wrap="square" rtlCol="0" anchor="ctr"/>
           <a:lstStyle/>
           <a:p>
             <a:pPr algn="ctr">
@@ -7064,7 +7037,7 @@
                 <a:solidFill>
                   <a:srgbClr val="000000"/>
                 </a:solidFill>
-                <a:latin typeface="Microsoft YaHei"/>
+                <a:latin typeface="微软雅黑" panose="020B0503020204020204" charset="-122"/>
               </a:defRPr>
             </a:pPr>
             <a:r>
@@ -7111,7 +7084,7 @@
           </a:fontRef>
         </p:style>
         <p:txBody>
-          <a:bodyPr rtlCol="0" anchor="ctr" wrap="square"/>
+          <a:bodyPr wrap="square" rtlCol="0" anchor="ctr"/>
           <a:lstStyle/>
           <a:p>
             <a:pPr algn="l">
@@ -7119,7 +7092,7 @@
                 <a:solidFill>
                   <a:srgbClr val="000000"/>
                 </a:solidFill>
-                <a:latin typeface="Microsoft YaHei"/>
+                <a:latin typeface="微软雅黑" panose="020B0503020204020204" charset="-122"/>
               </a:defRPr>
             </a:pPr>
             <a:r>
@@ -7166,7 +7139,7 @@
           </a:fontRef>
         </p:style>
         <p:txBody>
-          <a:bodyPr rtlCol="0" anchor="ctr" wrap="square"/>
+          <a:bodyPr wrap="square" rtlCol="0" anchor="ctr"/>
           <a:lstStyle/>
           <a:p>
             <a:pPr algn="ctr">
@@ -7174,7 +7147,7 @@
                 <a:solidFill>
                   <a:srgbClr val="000000"/>
                 </a:solidFill>
-                <a:latin typeface="Microsoft YaHei"/>
+                <a:latin typeface="微软雅黑" panose="020B0503020204020204" charset="-122"/>
               </a:defRPr>
             </a:pPr>
             <a:r>
@@ -7221,7 +7194,7 @@
           </a:fontRef>
         </p:style>
         <p:txBody>
-          <a:bodyPr rtlCol="0" anchor="ctr" wrap="square"/>
+          <a:bodyPr wrap="square" rtlCol="0" anchor="ctr"/>
           <a:lstStyle/>
           <a:p>
             <a:pPr algn="ctr">
@@ -7229,7 +7202,7 @@
                 <a:solidFill>
                   <a:srgbClr val="000000"/>
                 </a:solidFill>
-                <a:latin typeface="Microsoft YaHei"/>
+                <a:latin typeface="微软雅黑" panose="020B0503020204020204" charset="-122"/>
               </a:defRPr>
             </a:pPr>
             <a:r>
@@ -7265,7 +7238,7 @@
                 <a:solidFill>
                   <a:srgbClr val="555555"/>
                 </a:solidFill>
-                <a:latin typeface="Microsoft YaHei"/>
+                <a:latin typeface="微软雅黑" panose="020B0503020204020204" charset="-122"/>
               </a:defRPr>
             </a:pPr>
             <a:r>
@@ -7361,7 +7334,7 @@
 </file>
 
 <file path=ppt/slides/slide12.xml><?xml version="1.0" encoding="utf-8"?>
-<p:sld xmlns:a="http://schemas.openxmlformats.org/drawingml/2006/main" xmlns:p="http://schemas.openxmlformats.org/presentationml/2006/main" xmlns:r="http://schemas.openxmlformats.org/officeDocument/2006/relationships">
+<p:sld xmlns:a="http://schemas.openxmlformats.org/drawingml/2006/main" xmlns:r="http://schemas.openxmlformats.org/officeDocument/2006/relationships" xmlns:p="http://schemas.openxmlformats.org/presentationml/2006/main">
   <p:cSld>
     <p:bg>
       <p:bgPr>
@@ -7526,7 +7499,7 @@
                 <a:solidFill>
                   <a:srgbClr val="27AE60"/>
                 </a:solidFill>
-                <a:latin typeface="Microsoft YaHei"/>
+                <a:latin typeface="微软雅黑" panose="020B0503020204020204" charset="-122"/>
               </a:defRPr>
             </a:pPr>
             <a:r>
@@ -7562,7 +7535,7 @@
                 <a:solidFill>
                   <a:srgbClr val="000000"/>
                 </a:solidFill>
-                <a:latin typeface="Microsoft YaHei"/>
+                <a:latin typeface="微软雅黑" panose="020B0503020204020204" charset="-122"/>
               </a:defRPr>
             </a:pPr>
             <a:r>
@@ -7598,7 +7571,7 @@
                 <a:solidFill>
                   <a:srgbClr val="27AE60"/>
                 </a:solidFill>
-                <a:latin typeface="Microsoft YaHei"/>
+                <a:latin typeface="微软雅黑" panose="020B0503020204020204" charset="-122"/>
               </a:defRPr>
             </a:pPr>
             <a:r>
@@ -7634,7 +7607,7 @@
                 <a:solidFill>
                   <a:srgbClr val="000000"/>
                 </a:solidFill>
-                <a:latin typeface="Microsoft YaHei"/>
+                <a:latin typeface="微软雅黑" panose="020B0503020204020204" charset="-122"/>
               </a:defRPr>
             </a:pPr>
             <a:r>
@@ -7670,7 +7643,7 @@
                 <a:solidFill>
                   <a:srgbClr val="27AE60"/>
                 </a:solidFill>
-                <a:latin typeface="Microsoft YaHei"/>
+                <a:latin typeface="微软雅黑" panose="020B0503020204020204" charset="-122"/>
               </a:defRPr>
             </a:pPr>
             <a:r>
@@ -7706,7 +7679,7 @@
                 <a:solidFill>
                   <a:srgbClr val="000000"/>
                 </a:solidFill>
-                <a:latin typeface="Microsoft YaHei"/>
+                <a:latin typeface="微软雅黑" panose="020B0503020204020204" charset="-122"/>
               </a:defRPr>
             </a:pPr>
             <a:r>
@@ -7742,7 +7715,7 @@
                 <a:solidFill>
                   <a:srgbClr val="27AE60"/>
                 </a:solidFill>
-                <a:latin typeface="Microsoft YaHei"/>
+                <a:latin typeface="微软雅黑" panose="020B0503020204020204" charset="-122"/>
               </a:defRPr>
             </a:pPr>
             <a:r>
@@ -7778,7 +7751,7 @@
                 <a:solidFill>
                   <a:srgbClr val="000000"/>
                 </a:solidFill>
-                <a:latin typeface="Microsoft YaHei"/>
+                <a:latin typeface="微软雅黑" panose="020B0503020204020204" charset="-122"/>
               </a:defRPr>
             </a:pPr>
             <a:r>
@@ -7814,7 +7787,7 @@
                 <a:solidFill>
                   <a:srgbClr val="27AE60"/>
                 </a:solidFill>
-                <a:latin typeface="Microsoft YaHei"/>
+                <a:latin typeface="微软雅黑" panose="020B0503020204020204" charset="-122"/>
               </a:defRPr>
             </a:pPr>
             <a:r>
@@ -7850,7 +7823,7 @@
                 <a:solidFill>
                   <a:srgbClr val="000000"/>
                 </a:solidFill>
-                <a:latin typeface="Microsoft YaHei"/>
+                <a:latin typeface="微软雅黑" panose="020B0503020204020204" charset="-122"/>
               </a:defRPr>
             </a:pPr>
             <a:r>
@@ -7886,7 +7859,7 @@
                 <a:solidFill>
                   <a:srgbClr val="27AE60"/>
                 </a:solidFill>
-                <a:latin typeface="Microsoft YaHei"/>
+                <a:latin typeface="微软雅黑" panose="020B0503020204020204" charset="-122"/>
               </a:defRPr>
             </a:pPr>
             <a:r>
@@ -7922,7 +7895,7 @@
                 <a:solidFill>
                   <a:srgbClr val="000000"/>
                 </a:solidFill>
-                <a:latin typeface="Microsoft YaHei"/>
+                <a:latin typeface="微软雅黑" panose="020B0503020204020204" charset="-122"/>
               </a:defRPr>
             </a:pPr>
             <a:r>
@@ -7958,7 +7931,7 @@
                 <a:solidFill>
                   <a:srgbClr val="27AE60"/>
                 </a:solidFill>
-                <a:latin typeface="Microsoft YaHei"/>
+                <a:latin typeface="微软雅黑" panose="020B0503020204020204" charset="-122"/>
               </a:defRPr>
             </a:pPr>
             <a:r>
@@ -7994,7 +7967,7 @@
                 <a:solidFill>
                   <a:srgbClr val="000000"/>
                 </a:solidFill>
-                <a:latin typeface="Microsoft YaHei"/>
+                <a:latin typeface="微软雅黑" panose="020B0503020204020204" charset="-122"/>
               </a:defRPr>
             </a:pPr>
             <a:r>
@@ -8042,7 +8015,7 @@
           </a:fontRef>
         </p:style>
         <p:txBody>
-          <a:bodyPr rtlCol="0" anchor="ctr" wrap="square"/>
+          <a:bodyPr wrap="square" rtlCol="0" anchor="ctr"/>
           <a:lstStyle/>
           <a:p>
             <a:pPr algn="ctr">
@@ -8050,7 +8023,7 @@
                 <a:solidFill>
                   <a:srgbClr val="555555"/>
                 </a:solidFill>
-                <a:latin typeface="Microsoft YaHei"/>
+                <a:latin typeface="微软雅黑" panose="020B0503020204020204" charset="-122"/>
               </a:defRPr>
             </a:pPr>
             <a:r>
@@ -8104,7 +8077,7 @@
                 <a:solidFill>
                   <a:srgbClr val="2C3E50"/>
                 </a:solidFill>
-                <a:latin typeface="Microsoft YaHei"/>
+                <a:latin typeface="微软雅黑" panose="020B0503020204020204" charset="-122"/>
               </a:defRPr>
             </a:pPr>
             <a:r>
@@ -8200,7 +8173,7 @@
 </file>
 
 <file path=ppt/slides/slide13.xml><?xml version="1.0" encoding="utf-8"?>
-<p:sld xmlns:a="http://schemas.openxmlformats.org/drawingml/2006/main" xmlns:p="http://schemas.openxmlformats.org/presentationml/2006/main" xmlns:r="http://schemas.openxmlformats.org/officeDocument/2006/relationships">
+<p:sld xmlns:a="http://schemas.openxmlformats.org/drawingml/2006/main" xmlns:r="http://schemas.openxmlformats.org/officeDocument/2006/relationships" xmlns:p="http://schemas.openxmlformats.org/presentationml/2006/main">
   <p:cSld>
     <p:bg>
       <p:bgPr>
@@ -8365,7 +8338,7 @@
                 <a:solidFill>
                   <a:srgbClr val="27AE60"/>
                 </a:solidFill>
-                <a:latin typeface="Microsoft YaHei"/>
+                <a:latin typeface="微软雅黑" panose="020B0503020204020204" charset="-122"/>
               </a:defRPr>
             </a:pPr>
             <a:r>
@@ -8401,7 +8374,7 @@
                 <a:solidFill>
                   <a:srgbClr val="000000"/>
                 </a:solidFill>
-                <a:latin typeface="Microsoft YaHei"/>
+                <a:latin typeface="微软雅黑" panose="020B0503020204020204" charset="-122"/>
               </a:defRPr>
             </a:pPr>
             <a:r>
@@ -8437,7 +8410,7 @@
                 <a:solidFill>
                   <a:srgbClr val="27AE60"/>
                 </a:solidFill>
-                <a:latin typeface="Microsoft YaHei"/>
+                <a:latin typeface="微软雅黑" panose="020B0503020204020204" charset="-122"/>
               </a:defRPr>
             </a:pPr>
             <a:r>
@@ -8473,7 +8446,7 @@
                 <a:solidFill>
                   <a:srgbClr val="000000"/>
                 </a:solidFill>
-                <a:latin typeface="Microsoft YaHei"/>
+                <a:latin typeface="微软雅黑" panose="020B0503020204020204" charset="-122"/>
               </a:defRPr>
             </a:pPr>
             <a:r>
@@ -8509,7 +8482,7 @@
                 <a:solidFill>
                   <a:srgbClr val="27AE60"/>
                 </a:solidFill>
-                <a:latin typeface="Microsoft YaHei"/>
+                <a:latin typeface="微软雅黑" panose="020B0503020204020204" charset="-122"/>
               </a:defRPr>
             </a:pPr>
             <a:r>
@@ -8545,7 +8518,7 @@
                 <a:solidFill>
                   <a:srgbClr val="000000"/>
                 </a:solidFill>
-                <a:latin typeface="Microsoft YaHei"/>
+                <a:latin typeface="微软雅黑" panose="020B0503020204020204" charset="-122"/>
               </a:defRPr>
             </a:pPr>
             <a:r>
@@ -8581,7 +8554,7 @@
                 <a:solidFill>
                   <a:srgbClr val="27AE60"/>
                 </a:solidFill>
-                <a:latin typeface="Microsoft YaHei"/>
+                <a:latin typeface="微软雅黑" panose="020B0503020204020204" charset="-122"/>
               </a:defRPr>
             </a:pPr>
             <a:r>
@@ -8617,7 +8590,7 @@
                 <a:solidFill>
                   <a:srgbClr val="000000"/>
                 </a:solidFill>
-                <a:latin typeface="Microsoft YaHei"/>
+                <a:latin typeface="微软雅黑" panose="020B0503020204020204" charset="-122"/>
               </a:defRPr>
             </a:pPr>
             <a:r>
@@ -8653,7 +8626,7 @@
                 <a:solidFill>
                   <a:srgbClr val="27AE60"/>
                 </a:solidFill>
-                <a:latin typeface="Microsoft YaHei"/>
+                <a:latin typeface="微软雅黑" panose="020B0503020204020204" charset="-122"/>
               </a:defRPr>
             </a:pPr>
             <a:r>
@@ -8689,7 +8662,7 @@
                 <a:solidFill>
                   <a:srgbClr val="000000"/>
                 </a:solidFill>
-                <a:latin typeface="Microsoft YaHei"/>
+                <a:latin typeface="微软雅黑" panose="020B0503020204020204" charset="-122"/>
               </a:defRPr>
             </a:pPr>
             <a:r>
@@ -8725,7 +8698,7 @@
                 <a:solidFill>
                   <a:srgbClr val="27AE60"/>
                 </a:solidFill>
-                <a:latin typeface="Microsoft YaHei"/>
+                <a:latin typeface="微软雅黑" panose="020B0503020204020204" charset="-122"/>
               </a:defRPr>
             </a:pPr>
             <a:r>
@@ -8761,7 +8734,7 @@
                 <a:solidFill>
                   <a:srgbClr val="000000"/>
                 </a:solidFill>
-                <a:latin typeface="Microsoft YaHei"/>
+                <a:latin typeface="微软雅黑" panose="020B0503020204020204" charset="-122"/>
               </a:defRPr>
             </a:pPr>
             <a:r>
@@ -8797,7 +8770,7 @@
                 <a:solidFill>
                   <a:srgbClr val="27AE60"/>
                 </a:solidFill>
-                <a:latin typeface="Microsoft YaHei"/>
+                <a:latin typeface="微软雅黑" panose="020B0503020204020204" charset="-122"/>
               </a:defRPr>
             </a:pPr>
             <a:r>
@@ -8833,7 +8806,7 @@
                 <a:solidFill>
                   <a:srgbClr val="000000"/>
                 </a:solidFill>
-                <a:latin typeface="Microsoft YaHei"/>
+                <a:latin typeface="微软雅黑" panose="020B0503020204020204" charset="-122"/>
               </a:defRPr>
             </a:pPr>
             <a:r>
@@ -8881,7 +8854,7 @@
           </a:fontRef>
         </p:style>
         <p:txBody>
-          <a:bodyPr rtlCol="0" anchor="ctr" wrap="square"/>
+          <a:bodyPr wrap="square" rtlCol="0" anchor="ctr"/>
           <a:lstStyle/>
           <a:p>
             <a:pPr algn="ctr">
@@ -8889,7 +8862,7 @@
                 <a:solidFill>
                   <a:srgbClr val="555555"/>
                 </a:solidFill>
-                <a:latin typeface="Microsoft YaHei"/>
+                <a:latin typeface="微软雅黑" panose="020B0503020204020204" charset="-122"/>
               </a:defRPr>
             </a:pPr>
             <a:r>
@@ -8943,7 +8916,7 @@
                 <a:solidFill>
                   <a:srgbClr val="2C3E50"/>
                 </a:solidFill>
-                <a:latin typeface="Microsoft YaHei"/>
+                <a:latin typeface="微软雅黑" panose="020B0503020204020204" charset="-122"/>
               </a:defRPr>
             </a:pPr>
             <a:r>
@@ -9039,7 +9012,7 @@
 </file>
 
 <file path=ppt/slides/slide14.xml><?xml version="1.0" encoding="utf-8"?>
-<p:sld xmlns:a="http://schemas.openxmlformats.org/drawingml/2006/main" xmlns:p="http://schemas.openxmlformats.org/presentationml/2006/main" xmlns:r="http://schemas.openxmlformats.org/officeDocument/2006/relationships">
+<p:sld xmlns:a="http://schemas.openxmlformats.org/drawingml/2006/main" xmlns:r="http://schemas.openxmlformats.org/officeDocument/2006/relationships" xmlns:p="http://schemas.openxmlformats.org/presentationml/2006/main">
   <p:cSld>
     <p:bg>
       <p:bgPr>
@@ -9207,7 +9180,7 @@
                 <a:solidFill>
                   <a:srgbClr val="555555"/>
                 </a:solidFill>
-                <a:latin typeface="Microsoft YaHei"/>
+                <a:latin typeface="微软雅黑" panose="020B0503020204020204" charset="-122"/>
               </a:defRPr>
             </a:pPr>
             <a:r>
@@ -9223,7 +9196,7 @@
                 <a:solidFill>
                   <a:srgbClr val="555555"/>
                 </a:solidFill>
-                <a:latin typeface="Microsoft YaHei"/>
+                <a:latin typeface="微软雅黑" panose="020B0503020204020204" charset="-122"/>
               </a:defRPr>
             </a:pPr>
             <a:r>
@@ -9259,7 +9232,7 @@
                 <a:solidFill>
                   <a:srgbClr val="2C3E50"/>
                 </a:solidFill>
-                <a:latin typeface="Microsoft YaHei"/>
+                <a:latin typeface="微软雅黑" panose="020B0503020204020204" charset="-122"/>
               </a:defRPr>
             </a:pPr>
             <a:r>
@@ -9340,7 +9313,7 @@
                 <a:solidFill>
                   <a:srgbClr val="3498DB"/>
                 </a:solidFill>
-                <a:latin typeface="Microsoft YaHei"/>
+                <a:latin typeface="微软雅黑" panose="020B0503020204020204" charset="-122"/>
               </a:defRPr>
             </a:pPr>
             <a:r>
@@ -9376,7 +9349,7 @@
                 <a:solidFill>
                   <a:srgbClr val="2C3E50"/>
                 </a:solidFill>
-                <a:latin typeface="Microsoft YaHei"/>
+                <a:latin typeface="微软雅黑" panose="020B0503020204020204" charset="-122"/>
               </a:defRPr>
             </a:pPr>
             <a:r>
@@ -9412,7 +9385,7 @@
                 <a:solidFill>
                   <a:srgbClr val="555555"/>
                 </a:solidFill>
-                <a:latin typeface="Microsoft YaHei"/>
+                <a:latin typeface="微软雅黑" panose="020B0503020204020204" charset="-122"/>
               </a:defRPr>
             </a:pPr>
             <a:r>
@@ -9536,7 +9509,7 @@
                 <a:solidFill>
                   <a:srgbClr val="3498DB"/>
                 </a:solidFill>
-                <a:latin typeface="Microsoft YaHei"/>
+                <a:latin typeface="微软雅黑" panose="020B0503020204020204" charset="-122"/>
               </a:defRPr>
             </a:pPr>
             <a:r>
@@ -9572,7 +9545,7 @@
                 <a:solidFill>
                   <a:srgbClr val="2C3E50"/>
                 </a:solidFill>
-                <a:latin typeface="Microsoft YaHei"/>
+                <a:latin typeface="微软雅黑" panose="020B0503020204020204" charset="-122"/>
               </a:defRPr>
             </a:pPr>
             <a:r>
@@ -9608,7 +9581,7 @@
                 <a:solidFill>
                   <a:srgbClr val="555555"/>
                 </a:solidFill>
-                <a:latin typeface="Microsoft YaHei"/>
+                <a:latin typeface="微软雅黑" panose="020B0503020204020204" charset="-122"/>
               </a:defRPr>
             </a:pPr>
             <a:r>
@@ -9732,7 +9705,7 @@
                 <a:solidFill>
                   <a:srgbClr val="3498DB"/>
                 </a:solidFill>
-                <a:latin typeface="Microsoft YaHei"/>
+                <a:latin typeface="微软雅黑" panose="020B0503020204020204" charset="-122"/>
               </a:defRPr>
             </a:pPr>
             <a:r>
@@ -9768,7 +9741,7 @@
                 <a:solidFill>
                   <a:srgbClr val="2C3E50"/>
                 </a:solidFill>
-                <a:latin typeface="Microsoft YaHei"/>
+                <a:latin typeface="微软雅黑" panose="020B0503020204020204" charset="-122"/>
               </a:defRPr>
             </a:pPr>
             <a:r>
@@ -9804,7 +9777,7 @@
                 <a:solidFill>
                   <a:srgbClr val="555555"/>
                 </a:solidFill>
-                <a:latin typeface="Microsoft YaHei"/>
+                <a:latin typeface="微软雅黑" panose="020B0503020204020204" charset="-122"/>
               </a:defRPr>
             </a:pPr>
             <a:r>
@@ -9928,7 +9901,7 @@
                 <a:solidFill>
                   <a:srgbClr val="3498DB"/>
                 </a:solidFill>
-                <a:latin typeface="Microsoft YaHei"/>
+                <a:latin typeface="微软雅黑" panose="020B0503020204020204" charset="-122"/>
               </a:defRPr>
             </a:pPr>
             <a:r>
@@ -9964,7 +9937,7 @@
                 <a:solidFill>
                   <a:srgbClr val="2C3E50"/>
                 </a:solidFill>
-                <a:latin typeface="Microsoft YaHei"/>
+                <a:latin typeface="微软雅黑" panose="020B0503020204020204" charset="-122"/>
               </a:defRPr>
             </a:pPr>
             <a:r>
@@ -10000,7 +9973,7 @@
                 <a:solidFill>
                   <a:srgbClr val="555555"/>
                 </a:solidFill>
-                <a:latin typeface="Microsoft YaHei"/>
+                <a:latin typeface="微软雅黑" panose="020B0503020204020204" charset="-122"/>
               </a:defRPr>
             </a:pPr>
             <a:r>
@@ -10048,7 +10021,7 @@
           </a:fontRef>
         </p:style>
         <p:txBody>
-          <a:bodyPr rtlCol="0" anchor="ctr" wrap="square"/>
+          <a:bodyPr wrap="square" rtlCol="0" anchor="ctr"/>
           <a:lstStyle/>
           <a:p>
             <a:pPr algn="ctr">
@@ -10056,7 +10029,7 @@
                 <a:solidFill>
                   <a:srgbClr val="555555"/>
                 </a:solidFill>
-                <a:latin typeface="Microsoft YaHei"/>
+                <a:latin typeface="微软雅黑" panose="020B0503020204020204" charset="-122"/>
               </a:defRPr>
             </a:pPr>
             <a:r>
@@ -10092,7 +10065,7 @@
                 <a:solidFill>
                   <a:srgbClr val="E74C3C"/>
                 </a:solidFill>
-                <a:latin typeface="Microsoft YaHei"/>
+                <a:latin typeface="微软雅黑" panose="020B0503020204020204" charset="-122"/>
               </a:defRPr>
             </a:pPr>
             <a:r>
@@ -10145,7 +10118,7 @@
 </file>
 
 <file path=ppt/slides/slide15.xml><?xml version="1.0" encoding="utf-8"?>
-<p:sld xmlns:a="http://schemas.openxmlformats.org/drawingml/2006/main" xmlns:p="http://schemas.openxmlformats.org/presentationml/2006/main" xmlns:r="http://schemas.openxmlformats.org/officeDocument/2006/relationships">
+<p:sld xmlns:a="http://schemas.openxmlformats.org/drawingml/2006/main" xmlns:r="http://schemas.openxmlformats.org/officeDocument/2006/relationships" xmlns:p="http://schemas.openxmlformats.org/presentationml/2006/main">
   <p:cSld>
     <p:bg>
       <p:bgPr>
@@ -10359,7 +10332,7 @@
                 <a:solidFill>
                   <a:srgbClr val="555555"/>
                 </a:solidFill>
-                <a:latin typeface="Microsoft YaHei"/>
+                <a:latin typeface="微软雅黑" panose="020B0503020204020204" charset="-122"/>
               </a:defRPr>
             </a:pPr>
             <a:r>
@@ -10375,7 +10348,7 @@
                 <a:solidFill>
                   <a:srgbClr val="555555"/>
                 </a:solidFill>
-                <a:latin typeface="Microsoft YaHei"/>
+                <a:latin typeface="微软雅黑" panose="020B0503020204020204" charset="-122"/>
               </a:defRPr>
             </a:pPr>
           </a:p>
@@ -10388,7 +10361,7 @@
                 <a:solidFill>
                   <a:srgbClr val="555555"/>
                 </a:solidFill>
-                <a:latin typeface="Microsoft YaHei"/>
+                <a:latin typeface="微软雅黑" panose="020B0503020204020204" charset="-122"/>
               </a:defRPr>
             </a:pPr>
             <a:r>
@@ -10404,7 +10377,7 @@
                 <a:solidFill>
                   <a:srgbClr val="555555"/>
                 </a:solidFill>
-                <a:latin typeface="Microsoft YaHei"/>
+                <a:latin typeface="微软雅黑" panose="020B0503020204020204" charset="-122"/>
               </a:defRPr>
             </a:pPr>
           </a:p>
@@ -10417,7 +10390,7 @@
                 <a:solidFill>
                   <a:srgbClr val="555555"/>
                 </a:solidFill>
-                <a:latin typeface="Microsoft YaHei"/>
+                <a:latin typeface="微软雅黑" panose="020B0503020204020204" charset="-122"/>
               </a:defRPr>
             </a:pPr>
             <a:r>
@@ -10433,7 +10406,7 @@
                 <a:solidFill>
                   <a:srgbClr val="555555"/>
                 </a:solidFill>
-                <a:latin typeface="Microsoft YaHei"/>
+                <a:latin typeface="微软雅黑" panose="020B0503020204020204" charset="-122"/>
               </a:defRPr>
             </a:pPr>
             <a:r>
@@ -10449,7 +10422,7 @@
                 <a:solidFill>
                   <a:srgbClr val="555555"/>
                 </a:solidFill>
-                <a:latin typeface="Microsoft YaHei"/>
+                <a:latin typeface="微软雅黑" panose="020B0503020204020204" charset="-122"/>
               </a:defRPr>
             </a:pPr>
             <a:r>
@@ -10465,7 +10438,7 @@
                 <a:solidFill>
                   <a:srgbClr val="555555"/>
                 </a:solidFill>
-                <a:latin typeface="Microsoft YaHei"/>
+                <a:latin typeface="微软雅黑" panose="020B0503020204020204" charset="-122"/>
               </a:defRPr>
             </a:pPr>
           </a:p>
@@ -10478,7 +10451,7 @@
                 <a:solidFill>
                   <a:srgbClr val="555555"/>
                 </a:solidFill>
-                <a:latin typeface="Microsoft YaHei"/>
+                <a:latin typeface="微软雅黑" panose="020B0503020204020204" charset="-122"/>
               </a:defRPr>
             </a:pPr>
           </a:p>
@@ -10491,7 +10464,7 @@
                 <a:solidFill>
                   <a:srgbClr val="555555"/>
                 </a:solidFill>
-                <a:latin typeface="Microsoft YaHei"/>
+                <a:latin typeface="微软雅黑" panose="020B0503020204020204" charset="-122"/>
               </a:defRPr>
             </a:pPr>
           </a:p>
@@ -10504,7 +10477,7 @@
                 <a:solidFill>
                   <a:srgbClr val="555555"/>
                 </a:solidFill>
-                <a:latin typeface="Microsoft YaHei"/>
+                <a:latin typeface="微软雅黑" panose="020B0503020204020204" charset="-122"/>
               </a:defRPr>
             </a:pPr>
           </a:p>
@@ -10517,7 +10490,7 @@
                 <a:solidFill>
                   <a:srgbClr val="555555"/>
                 </a:solidFill>
-                <a:latin typeface="Microsoft YaHei"/>
+                <a:latin typeface="微软雅黑" panose="020B0503020204020204" charset="-122"/>
               </a:defRPr>
             </a:pPr>
             <a:r>
@@ -10553,7 +10526,7 @@
                 <a:solidFill>
                   <a:srgbClr val="2C3E50"/>
                 </a:solidFill>
-                <a:latin typeface="Microsoft YaHei"/>
+                <a:latin typeface="微软雅黑" panose="020B0503020204020204" charset="-122"/>
               </a:defRPr>
             </a:pPr>
             <a:r>
@@ -10649,7 +10622,7 @@
 </file>
 
 <file path=ppt/slides/slide16.xml><?xml version="1.0" encoding="utf-8"?>
-<p:sld xmlns:a="http://schemas.openxmlformats.org/drawingml/2006/main" xmlns:p="http://schemas.openxmlformats.org/presentationml/2006/main" xmlns:r="http://schemas.openxmlformats.org/officeDocument/2006/relationships">
+<p:sld xmlns:a="http://schemas.openxmlformats.org/drawingml/2006/main" xmlns:r="http://schemas.openxmlformats.org/officeDocument/2006/relationships" xmlns:p="http://schemas.openxmlformats.org/presentationml/2006/main">
   <p:cSld>
     <p:bg>
       <p:bgPr>
@@ -10863,7 +10836,7 @@
                 <a:solidFill>
                   <a:srgbClr val="555555"/>
                 </a:solidFill>
-                <a:latin typeface="Microsoft YaHei"/>
+                <a:latin typeface="微软雅黑" panose="020B0503020204020204" charset="-122"/>
               </a:defRPr>
             </a:pPr>
             <a:r>
@@ -10879,7 +10852,7 @@
                 <a:solidFill>
                   <a:srgbClr val="555555"/>
                 </a:solidFill>
-                <a:latin typeface="Microsoft YaHei"/>
+                <a:latin typeface="微软雅黑" panose="020B0503020204020204" charset="-122"/>
               </a:defRPr>
             </a:pPr>
           </a:p>
@@ -10892,7 +10865,7 @@
                 <a:solidFill>
                   <a:srgbClr val="555555"/>
                 </a:solidFill>
-                <a:latin typeface="Microsoft YaHei"/>
+                <a:latin typeface="微软雅黑" panose="020B0503020204020204" charset="-122"/>
               </a:defRPr>
             </a:pPr>
             <a:r>
@@ -10908,7 +10881,7 @@
                 <a:solidFill>
                   <a:srgbClr val="555555"/>
                 </a:solidFill>
-                <a:latin typeface="Microsoft YaHei"/>
+                <a:latin typeface="微软雅黑" panose="020B0503020204020204" charset="-122"/>
               </a:defRPr>
             </a:pPr>
           </a:p>
@@ -10921,7 +10894,7 @@
                 <a:solidFill>
                   <a:srgbClr val="555555"/>
                 </a:solidFill>
-                <a:latin typeface="Microsoft YaHei"/>
+                <a:latin typeface="微软雅黑" panose="020B0503020204020204" charset="-122"/>
               </a:defRPr>
             </a:pPr>
             <a:r>
@@ -10937,7 +10910,7 @@
                 <a:solidFill>
                   <a:srgbClr val="555555"/>
                 </a:solidFill>
-                <a:latin typeface="Microsoft YaHei"/>
+                <a:latin typeface="微软雅黑" panose="020B0503020204020204" charset="-122"/>
               </a:defRPr>
             </a:pPr>
             <a:r>
@@ -10953,7 +10926,7 @@
                 <a:solidFill>
                   <a:srgbClr val="555555"/>
                 </a:solidFill>
-                <a:latin typeface="Microsoft YaHei"/>
+                <a:latin typeface="微软雅黑" panose="020B0503020204020204" charset="-122"/>
               </a:defRPr>
             </a:pPr>
             <a:r>
@@ -10969,7 +10942,7 @@
                 <a:solidFill>
                   <a:srgbClr val="555555"/>
                 </a:solidFill>
-                <a:latin typeface="Microsoft YaHei"/>
+                <a:latin typeface="微软雅黑" panose="020B0503020204020204" charset="-122"/>
               </a:defRPr>
             </a:pPr>
             <a:r>
@@ -10985,7 +10958,7 @@
                 <a:solidFill>
                   <a:srgbClr val="555555"/>
                 </a:solidFill>
-                <a:latin typeface="Microsoft YaHei"/>
+                <a:latin typeface="微软雅黑" panose="020B0503020204020204" charset="-122"/>
               </a:defRPr>
             </a:pPr>
             <a:r>
@@ -11001,7 +10974,7 @@
                 <a:solidFill>
                   <a:srgbClr val="555555"/>
                 </a:solidFill>
-                <a:latin typeface="Microsoft YaHei"/>
+                <a:latin typeface="微软雅黑" panose="020B0503020204020204" charset="-122"/>
               </a:defRPr>
             </a:pPr>
           </a:p>
@@ -11014,7 +10987,7 @@
                 <a:solidFill>
                   <a:srgbClr val="555555"/>
                 </a:solidFill>
-                <a:latin typeface="Microsoft YaHei"/>
+                <a:latin typeface="微软雅黑" panose="020B0503020204020204" charset="-122"/>
               </a:defRPr>
             </a:pPr>
           </a:p>
@@ -11027,7 +11000,7 @@
                 <a:solidFill>
                   <a:srgbClr val="555555"/>
                 </a:solidFill>
-                <a:latin typeface="Microsoft YaHei"/>
+                <a:latin typeface="微软雅黑" panose="020B0503020204020204" charset="-122"/>
               </a:defRPr>
             </a:pPr>
           </a:p>
@@ -11040,7 +11013,7 @@
                 <a:solidFill>
                   <a:srgbClr val="555555"/>
                 </a:solidFill>
-                <a:latin typeface="Microsoft YaHei"/>
+                <a:latin typeface="微软雅黑" panose="020B0503020204020204" charset="-122"/>
               </a:defRPr>
             </a:pPr>
             <a:r>
@@ -11076,7 +11049,7 @@
                 <a:solidFill>
                   <a:srgbClr val="2C3E50"/>
                 </a:solidFill>
-                <a:latin typeface="Microsoft YaHei"/>
+                <a:latin typeface="微软雅黑" panose="020B0503020204020204" charset="-122"/>
               </a:defRPr>
             </a:pPr>
             <a:r>
@@ -11172,7 +11145,7 @@
 </file>
 
 <file path=ppt/slides/slide17.xml><?xml version="1.0" encoding="utf-8"?>
-<p:sld xmlns:a="http://schemas.openxmlformats.org/drawingml/2006/main" xmlns:p="http://schemas.openxmlformats.org/presentationml/2006/main" xmlns:r="http://schemas.openxmlformats.org/officeDocument/2006/relationships">
+<p:sld xmlns:a="http://schemas.openxmlformats.org/drawingml/2006/main" xmlns:r="http://schemas.openxmlformats.org/officeDocument/2006/relationships" xmlns:p="http://schemas.openxmlformats.org/presentationml/2006/main">
   <p:cSld>
     <p:bg>
       <p:bgPr>
@@ -11382,7 +11355,7 @@
                 <a:solidFill>
                   <a:srgbClr val="3498DB"/>
                 </a:solidFill>
-                <a:latin typeface="Microsoft YaHei"/>
+                <a:latin typeface="微软雅黑" panose="020B0503020204020204" charset="-122"/>
               </a:defRPr>
             </a:pPr>
             <a:r>
@@ -11464,7 +11437,7 @@
                 <a:solidFill>
                   <a:srgbClr val="000000"/>
                 </a:solidFill>
-                <a:latin typeface="Microsoft YaHei"/>
+                <a:latin typeface="微软雅黑" panose="020B0503020204020204" charset="-122"/>
               </a:defRPr>
             </a:pPr>
             <a:r>
@@ -11480,7 +11453,7 @@
                 <a:solidFill>
                   <a:srgbClr val="000000"/>
                 </a:solidFill>
-                <a:latin typeface="Microsoft YaHei"/>
+                <a:latin typeface="微软雅黑" panose="020B0503020204020204" charset="-122"/>
               </a:defRPr>
             </a:pPr>
             <a:r>
@@ -11496,7 +11469,7 @@
                 <a:solidFill>
                   <a:srgbClr val="000000"/>
                 </a:solidFill>
-                <a:latin typeface="Microsoft YaHei"/>
+                <a:latin typeface="微软雅黑" panose="020B0503020204020204" charset="-122"/>
               </a:defRPr>
             </a:pPr>
             <a:r>
@@ -11512,7 +11485,7 @@
                 <a:solidFill>
                   <a:srgbClr val="000000"/>
                 </a:solidFill>
-                <a:latin typeface="Microsoft YaHei"/>
+                <a:latin typeface="微软雅黑" panose="020B0503020204020204" charset="-122"/>
               </a:defRPr>
             </a:pPr>
             <a:r>
@@ -11528,7 +11501,7 @@
                 <a:solidFill>
                   <a:srgbClr val="000000"/>
                 </a:solidFill>
-                <a:latin typeface="Microsoft YaHei"/>
+                <a:latin typeface="微软雅黑" panose="020B0503020204020204" charset="-122"/>
               </a:defRPr>
             </a:pPr>
             <a:r>
@@ -11544,7 +11517,7 @@
                 <a:solidFill>
                   <a:srgbClr val="000000"/>
                 </a:solidFill>
-                <a:latin typeface="Microsoft YaHei"/>
+                <a:latin typeface="微软雅黑" panose="020B0503020204020204" charset="-122"/>
               </a:defRPr>
             </a:pPr>
           </a:p>
@@ -11557,7 +11530,7 @@
                 <a:solidFill>
                   <a:srgbClr val="000000"/>
                 </a:solidFill>
-                <a:latin typeface="Microsoft YaHei"/>
+                <a:latin typeface="微软雅黑" panose="020B0503020204020204" charset="-122"/>
               </a:defRPr>
             </a:pPr>
             <a:r>
@@ -11573,7 +11546,7 @@
                 <a:solidFill>
                   <a:srgbClr val="000000"/>
                 </a:solidFill>
-                <a:latin typeface="Microsoft YaHei"/>
+                <a:latin typeface="微软雅黑" panose="020B0503020204020204" charset="-122"/>
               </a:defRPr>
             </a:pPr>
             <a:r>
@@ -11589,7 +11562,7 @@
                 <a:solidFill>
                   <a:srgbClr val="000000"/>
                 </a:solidFill>
-                <a:latin typeface="Microsoft YaHei"/>
+                <a:latin typeface="微软雅黑" panose="020B0503020204020204" charset="-122"/>
               </a:defRPr>
             </a:pPr>
             <a:r>
@@ -11605,7 +11578,7 @@
                 <a:solidFill>
                   <a:srgbClr val="000000"/>
                 </a:solidFill>
-                <a:latin typeface="Microsoft YaHei"/>
+                <a:latin typeface="微软雅黑" panose="020B0503020204020204" charset="-122"/>
               </a:defRPr>
             </a:pPr>
             <a:r>
@@ -11621,7 +11594,7 @@
                 <a:solidFill>
                   <a:srgbClr val="000000"/>
                 </a:solidFill>
-                <a:latin typeface="Microsoft YaHei"/>
+                <a:latin typeface="微软雅黑" panose="020B0503020204020204" charset="-122"/>
               </a:defRPr>
             </a:pPr>
           </a:p>
@@ -11634,7 +11607,7 @@
                 <a:solidFill>
                   <a:srgbClr val="000000"/>
                 </a:solidFill>
-                <a:latin typeface="Microsoft YaHei"/>
+                <a:latin typeface="微软雅黑" panose="020B0503020204020204" charset="-122"/>
               </a:defRPr>
             </a:pPr>
             <a:r>
@@ -11650,7 +11623,7 @@
                 <a:solidFill>
                   <a:srgbClr val="000000"/>
                 </a:solidFill>
-                <a:latin typeface="Microsoft YaHei"/>
+                <a:latin typeface="微软雅黑" panose="020B0503020204020204" charset="-122"/>
               </a:defRPr>
             </a:pPr>
             <a:r>
@@ -11666,7 +11639,7 @@
                 <a:solidFill>
                   <a:srgbClr val="000000"/>
                 </a:solidFill>
-                <a:latin typeface="Microsoft YaHei"/>
+                <a:latin typeface="微软雅黑" panose="020B0503020204020204" charset="-122"/>
               </a:defRPr>
             </a:pPr>
             <a:r>
@@ -11682,7 +11655,7 @@
                 <a:solidFill>
                   <a:srgbClr val="000000"/>
                 </a:solidFill>
-                <a:latin typeface="Microsoft YaHei"/>
+                <a:latin typeface="微软雅黑" panose="020B0503020204020204" charset="-122"/>
               </a:defRPr>
             </a:pPr>
           </a:p>
@@ -11695,7 +11668,7 @@
                 <a:solidFill>
                   <a:srgbClr val="000000"/>
                 </a:solidFill>
-                <a:latin typeface="Microsoft YaHei"/>
+                <a:latin typeface="微软雅黑" panose="020B0503020204020204" charset="-122"/>
               </a:defRPr>
             </a:pPr>
             <a:r>
@@ -11711,7 +11684,7 @@
                 <a:solidFill>
                   <a:srgbClr val="000000"/>
                 </a:solidFill>
-                <a:latin typeface="Microsoft YaHei"/>
+                <a:latin typeface="微软雅黑" panose="020B0503020204020204" charset="-122"/>
               </a:defRPr>
             </a:pPr>
             <a:r>
@@ -11727,7 +11700,7 @@
                 <a:solidFill>
                   <a:srgbClr val="000000"/>
                 </a:solidFill>
-                <a:latin typeface="Microsoft YaHei"/>
+                <a:latin typeface="微软雅黑" panose="020B0503020204020204" charset="-122"/>
               </a:defRPr>
             </a:pPr>
             <a:r>
@@ -11808,7 +11781,7 @@
                 <a:solidFill>
                   <a:srgbClr val="2C3E50"/>
                 </a:solidFill>
-                <a:latin typeface="Microsoft YaHei"/>
+                <a:latin typeface="微软雅黑" panose="020B0503020204020204" charset="-122"/>
               </a:defRPr>
             </a:pPr>
             <a:r>
@@ -11899,7 +11872,7 @@
           </a:fontRef>
         </p:style>
         <p:txBody>
-          <a:bodyPr rtlCol="0" anchor="ctr" wrap="square"/>
+          <a:bodyPr wrap="square" rtlCol="0" anchor="ctr"/>
           <a:lstStyle/>
           <a:p>
             <a:pPr algn="ctr">
@@ -11907,7 +11880,7 @@
                 <a:solidFill>
                   <a:srgbClr val="555555"/>
                 </a:solidFill>
-                <a:latin typeface="Microsoft YaHei"/>
+                <a:latin typeface="微软雅黑" panose="020B0503020204020204" charset="-122"/>
               </a:defRPr>
             </a:pPr>
             <a:r>
@@ -12019,7 +11992,7 @@
 </file>
 
 <file path=ppt/slides/slide18.xml><?xml version="1.0" encoding="utf-8"?>
-<p:sld xmlns:a="http://schemas.openxmlformats.org/drawingml/2006/main" xmlns:p="http://schemas.openxmlformats.org/presentationml/2006/main" xmlns:r="http://schemas.openxmlformats.org/officeDocument/2006/relationships">
+<p:sld xmlns:a="http://schemas.openxmlformats.org/drawingml/2006/main" xmlns:r="http://schemas.openxmlformats.org/officeDocument/2006/relationships" xmlns:p="http://schemas.openxmlformats.org/presentationml/2006/main">
   <p:cSld>
     <p:bg>
       <p:bgPr>
@@ -12184,7 +12157,7 @@
                 <a:solidFill>
                   <a:srgbClr val="27AE60"/>
                 </a:solidFill>
-                <a:latin typeface="Microsoft YaHei"/>
+                <a:latin typeface="微软雅黑" panose="020B0503020204020204" charset="-122"/>
               </a:defRPr>
             </a:pPr>
             <a:r>
@@ -12308,7 +12281,7 @@
                 <a:solidFill>
                   <a:srgbClr val="3498DB"/>
                 </a:solidFill>
-                <a:latin typeface="Microsoft YaHei"/>
+                <a:latin typeface="微软雅黑" panose="020B0503020204020204" charset="-122"/>
               </a:defRPr>
             </a:pPr>
             <a:r>
@@ -12347,7 +12320,7 @@
                 <a:solidFill>
                   <a:srgbClr val="555555"/>
                 </a:solidFill>
-                <a:latin typeface="Microsoft YaHei"/>
+                <a:latin typeface="微软雅黑" panose="020B0503020204020204" charset="-122"/>
               </a:defRPr>
             </a:pPr>
             <a:r>
@@ -12363,7 +12336,7 @@
                 <a:solidFill>
                   <a:srgbClr val="555555"/>
                 </a:solidFill>
-                <a:latin typeface="Microsoft YaHei"/>
+                <a:latin typeface="微软雅黑" panose="020B0503020204020204" charset="-122"/>
               </a:defRPr>
             </a:pPr>
             <a:r>
@@ -12379,7 +12352,7 @@
                 <a:solidFill>
                   <a:srgbClr val="555555"/>
                 </a:solidFill>
-                <a:latin typeface="Microsoft YaHei"/>
+                <a:latin typeface="微软雅黑" panose="020B0503020204020204" charset="-122"/>
               </a:defRPr>
             </a:pPr>
             <a:r>
@@ -12503,7 +12476,7 @@
                 <a:solidFill>
                   <a:srgbClr val="3498DB"/>
                 </a:solidFill>
-                <a:latin typeface="Microsoft YaHei"/>
+                <a:latin typeface="微软雅黑" panose="020B0503020204020204" charset="-122"/>
               </a:defRPr>
             </a:pPr>
             <a:r>
@@ -12542,7 +12515,7 @@
                 <a:solidFill>
                   <a:srgbClr val="555555"/>
                 </a:solidFill>
-                <a:latin typeface="Microsoft YaHei"/>
+                <a:latin typeface="微软雅黑" panose="020B0503020204020204" charset="-122"/>
               </a:defRPr>
             </a:pPr>
             <a:r>
@@ -12558,7 +12531,7 @@
                 <a:solidFill>
                   <a:srgbClr val="555555"/>
                 </a:solidFill>
-                <a:latin typeface="Microsoft YaHei"/>
+                <a:latin typeface="微软雅黑" panose="020B0503020204020204" charset="-122"/>
               </a:defRPr>
             </a:pPr>
             <a:r>
@@ -12574,7 +12547,7 @@
                 <a:solidFill>
                   <a:srgbClr val="555555"/>
                 </a:solidFill>
-                <a:latin typeface="Microsoft YaHei"/>
+                <a:latin typeface="微软雅黑" panose="020B0503020204020204" charset="-122"/>
               </a:defRPr>
             </a:pPr>
             <a:r>
@@ -12610,7 +12583,7 @@
                 <a:solidFill>
                   <a:srgbClr val="E74C3C"/>
                 </a:solidFill>
-                <a:latin typeface="Microsoft YaHei"/>
+                <a:latin typeface="微软雅黑" panose="020B0503020204020204" charset="-122"/>
               </a:defRPr>
             </a:pPr>
             <a:r>
@@ -12734,7 +12707,7 @@
                 <a:solidFill>
                   <a:srgbClr val="E67E22"/>
                 </a:solidFill>
-                <a:latin typeface="Microsoft YaHei"/>
+                <a:latin typeface="微软雅黑" panose="020B0503020204020204" charset="-122"/>
               </a:defRPr>
             </a:pPr>
             <a:r>
@@ -12773,7 +12746,7 @@
                 <a:solidFill>
                   <a:srgbClr val="555555"/>
                 </a:solidFill>
-                <a:latin typeface="Microsoft YaHei"/>
+                <a:latin typeface="微软雅黑" panose="020B0503020204020204" charset="-122"/>
               </a:defRPr>
             </a:pPr>
             <a:r>
@@ -12789,7 +12762,7 @@
                 <a:solidFill>
                   <a:srgbClr val="555555"/>
                 </a:solidFill>
-                <a:latin typeface="Microsoft YaHei"/>
+                <a:latin typeface="微软雅黑" panose="020B0503020204020204" charset="-122"/>
               </a:defRPr>
             </a:pPr>
             <a:r>
@@ -12805,7 +12778,7 @@
                 <a:solidFill>
                   <a:srgbClr val="555555"/>
                 </a:solidFill>
-                <a:latin typeface="Microsoft YaHei"/>
+                <a:latin typeface="微软雅黑" panose="020B0503020204020204" charset="-122"/>
               </a:defRPr>
             </a:pPr>
             <a:r>
@@ -12821,7 +12794,7 @@
                 <a:solidFill>
                   <a:srgbClr val="555555"/>
                 </a:solidFill>
-                <a:latin typeface="Microsoft YaHei"/>
+                <a:latin typeface="微软雅黑" panose="020B0503020204020204" charset="-122"/>
               </a:defRPr>
             </a:pPr>
             <a:r>
@@ -12945,7 +12918,7 @@
                 <a:solidFill>
                   <a:srgbClr val="E74C3C"/>
                 </a:solidFill>
-                <a:latin typeface="Microsoft YaHei"/>
+                <a:latin typeface="微软雅黑" panose="020B0503020204020204" charset="-122"/>
               </a:defRPr>
             </a:pPr>
             <a:r>
@@ -12984,7 +12957,7 @@
                 <a:solidFill>
                   <a:srgbClr val="555555"/>
                 </a:solidFill>
-                <a:latin typeface="Microsoft YaHei"/>
+                <a:latin typeface="微软雅黑" panose="020B0503020204020204" charset="-122"/>
               </a:defRPr>
             </a:pPr>
             <a:r>
@@ -13000,7 +12973,7 @@
                 <a:solidFill>
                   <a:srgbClr val="555555"/>
                 </a:solidFill>
-                <a:latin typeface="Microsoft YaHei"/>
+                <a:latin typeface="微软雅黑" panose="020B0503020204020204" charset="-122"/>
               </a:defRPr>
             </a:pPr>
             <a:r>
@@ -13016,7 +12989,7 @@
                 <a:solidFill>
                   <a:srgbClr val="555555"/>
                 </a:solidFill>
-                <a:latin typeface="Microsoft YaHei"/>
+                <a:latin typeface="微软雅黑" panose="020B0503020204020204" charset="-122"/>
               </a:defRPr>
             </a:pPr>
             <a:r>
@@ -13032,7 +13005,7 @@
                 <a:solidFill>
                   <a:srgbClr val="555555"/>
                 </a:solidFill>
-                <a:latin typeface="Microsoft YaHei"/>
+                <a:latin typeface="微软雅黑" panose="020B0503020204020204" charset="-122"/>
               </a:defRPr>
             </a:pPr>
             <a:r>
@@ -13068,7 +13041,7 @@
                 <a:solidFill>
                   <a:srgbClr val="2C3E50"/>
                 </a:solidFill>
-                <a:latin typeface="Microsoft YaHei"/>
+                <a:latin typeface="微软雅黑" panose="020B0503020204020204" charset="-122"/>
               </a:defRPr>
             </a:pPr>
             <a:r>
@@ -13164,7 +13137,7 @@
 </file>
 
 <file path=ppt/slides/slide2.xml><?xml version="1.0" encoding="utf-8"?>
-<p:sld xmlns:a="http://schemas.openxmlformats.org/drawingml/2006/main" xmlns:p="http://schemas.openxmlformats.org/presentationml/2006/main" xmlns:r="http://schemas.openxmlformats.org/officeDocument/2006/relationships">
+<p:sld xmlns:a="http://schemas.openxmlformats.org/drawingml/2006/main" xmlns:r="http://schemas.openxmlformats.org/officeDocument/2006/relationships" xmlns:p="http://schemas.openxmlformats.org/presentationml/2006/main">
   <p:cSld>
     <p:bg>
       <p:bgPr>
@@ -13251,7 +13224,7 @@
                 <a:solidFill>
                   <a:srgbClr val="2C3E50"/>
                 </a:solidFill>
-                <a:latin typeface="Microsoft YaHei"/>
+                <a:latin typeface="微软雅黑" panose="020B0503020204020204" charset="-122"/>
               </a:defRPr>
             </a:pPr>
             <a:r>
@@ -13382,7 +13355,7 @@
                 <a:solidFill>
                   <a:srgbClr val="2C3E50"/>
                 </a:solidFill>
-                <a:latin typeface="Microsoft YaHei"/>
+                <a:latin typeface="微软雅黑" panose="020B0503020204020204" charset="-122"/>
               </a:defRPr>
             </a:pPr>
             <a:r>
@@ -13418,7 +13391,7 @@
                 <a:solidFill>
                   <a:srgbClr val="555555"/>
                 </a:solidFill>
-                <a:latin typeface="Microsoft YaHei"/>
+                <a:latin typeface="微软雅黑" panose="020B0503020204020204" charset="-122"/>
               </a:defRPr>
             </a:pPr>
             <a:r>
@@ -13506,7 +13479,7 @@
                 <a:solidFill>
                   <a:srgbClr val="2C3E50"/>
                 </a:solidFill>
-                <a:latin typeface="Microsoft YaHei"/>
+                <a:latin typeface="微软雅黑" panose="020B0503020204020204" charset="-122"/>
               </a:defRPr>
             </a:pPr>
             <a:r>
@@ -13542,7 +13515,7 @@
                 <a:solidFill>
                   <a:srgbClr val="555555"/>
                 </a:solidFill>
-                <a:latin typeface="Microsoft YaHei"/>
+                <a:latin typeface="微软雅黑" panose="020B0503020204020204" charset="-122"/>
               </a:defRPr>
             </a:pPr>
             <a:r>
@@ -13630,7 +13603,7 @@
                 <a:solidFill>
                   <a:srgbClr val="2C3E50"/>
                 </a:solidFill>
-                <a:latin typeface="Microsoft YaHei"/>
+                <a:latin typeface="微软雅黑" panose="020B0503020204020204" charset="-122"/>
               </a:defRPr>
             </a:pPr>
             <a:r>
@@ -13666,7 +13639,7 @@
                 <a:solidFill>
                   <a:srgbClr val="555555"/>
                 </a:solidFill>
-                <a:latin typeface="Microsoft YaHei"/>
+                <a:latin typeface="微软雅黑" panose="020B0503020204020204" charset="-122"/>
               </a:defRPr>
             </a:pPr>
             <a:r>
@@ -13754,7 +13727,7 @@
                 <a:solidFill>
                   <a:srgbClr val="2C3E50"/>
                 </a:solidFill>
-                <a:latin typeface="Microsoft YaHei"/>
+                <a:latin typeface="微软雅黑" panose="020B0503020204020204" charset="-122"/>
               </a:defRPr>
             </a:pPr>
             <a:r>
@@ -13790,7 +13763,7 @@
                 <a:solidFill>
                   <a:srgbClr val="555555"/>
                 </a:solidFill>
-                <a:latin typeface="Microsoft YaHei"/>
+                <a:latin typeface="微软雅黑" panose="020B0503020204020204" charset="-122"/>
               </a:defRPr>
             </a:pPr>
             <a:r>
@@ -13878,7 +13851,7 @@
                 <a:solidFill>
                   <a:srgbClr val="2C3E50"/>
                 </a:solidFill>
-                <a:latin typeface="Microsoft YaHei"/>
+                <a:latin typeface="微软雅黑" panose="020B0503020204020204" charset="-122"/>
               </a:defRPr>
             </a:pPr>
             <a:r>
@@ -13914,7 +13887,7 @@
                 <a:solidFill>
                   <a:srgbClr val="555555"/>
                 </a:solidFill>
-                <a:latin typeface="Microsoft YaHei"/>
+                <a:latin typeface="微软雅黑" panose="020B0503020204020204" charset="-122"/>
               </a:defRPr>
             </a:pPr>
             <a:r>
@@ -14002,7 +13975,7 @@
                 <a:solidFill>
                   <a:srgbClr val="2C3E50"/>
                 </a:solidFill>
-                <a:latin typeface="Microsoft YaHei"/>
+                <a:latin typeface="微软雅黑" panose="020B0503020204020204" charset="-122"/>
               </a:defRPr>
             </a:pPr>
             <a:r>
@@ -14038,7 +14011,7 @@
                 <a:solidFill>
                   <a:srgbClr val="555555"/>
                 </a:solidFill>
-                <a:latin typeface="Microsoft YaHei"/>
+                <a:latin typeface="微软雅黑" panose="020B0503020204020204" charset="-122"/>
               </a:defRPr>
             </a:pPr>
             <a:r>
@@ -14126,7 +14099,7 @@
                 <a:solidFill>
                   <a:srgbClr val="2C3E50"/>
                 </a:solidFill>
-                <a:latin typeface="Microsoft YaHei"/>
+                <a:latin typeface="微软雅黑" panose="020B0503020204020204" charset="-122"/>
               </a:defRPr>
             </a:pPr>
             <a:r>
@@ -14162,7 +14135,7 @@
                 <a:solidFill>
                   <a:srgbClr val="555555"/>
                 </a:solidFill>
-                <a:latin typeface="Microsoft YaHei"/>
+                <a:latin typeface="微软雅黑" panose="020B0503020204020204" charset="-122"/>
               </a:defRPr>
             </a:pPr>
             <a:r>
@@ -14258,7 +14231,7 @@
 </file>
 
 <file path=ppt/slides/slide3.xml><?xml version="1.0" encoding="utf-8"?>
-<p:sld xmlns:a="http://schemas.openxmlformats.org/drawingml/2006/main" xmlns:p="http://schemas.openxmlformats.org/presentationml/2006/main" xmlns:r="http://schemas.openxmlformats.org/officeDocument/2006/relationships">
+<p:sld xmlns:a="http://schemas.openxmlformats.org/drawingml/2006/main" xmlns:r="http://schemas.openxmlformats.org/officeDocument/2006/relationships" xmlns:p="http://schemas.openxmlformats.org/presentationml/2006/main">
   <p:cSld>
     <p:bg>
       <p:bgPr>
@@ -14511,7 +14484,7 @@
                 <a:solidFill>
                   <a:srgbClr val="E74C3C"/>
                 </a:solidFill>
-                <a:latin typeface="Microsoft YaHei"/>
+                <a:latin typeface="微软雅黑" panose="020B0503020204020204" charset="-122"/>
               </a:defRPr>
             </a:pPr>
             <a:r>
@@ -14550,7 +14523,7 @@
                 <a:solidFill>
                   <a:srgbClr val="555555"/>
                 </a:solidFill>
-                <a:latin typeface="Microsoft YaHei"/>
+                <a:latin typeface="微软雅黑" panose="020B0503020204020204" charset="-122"/>
               </a:defRPr>
             </a:pPr>
             <a:r>
@@ -14566,7 +14539,7 @@
                 <a:solidFill>
                   <a:srgbClr val="555555"/>
                 </a:solidFill>
-                <a:latin typeface="Microsoft YaHei"/>
+                <a:latin typeface="微软雅黑" panose="020B0503020204020204" charset="-122"/>
               </a:defRPr>
             </a:pPr>
             <a:r>
@@ -14582,7 +14555,7 @@
                 <a:solidFill>
                   <a:srgbClr val="555555"/>
                 </a:solidFill>
-                <a:latin typeface="Microsoft YaHei"/>
+                <a:latin typeface="微软雅黑" panose="020B0503020204020204" charset="-122"/>
               </a:defRPr>
             </a:pPr>
             <a:r>
@@ -14598,7 +14571,7 @@
                 <a:solidFill>
                   <a:srgbClr val="555555"/>
                 </a:solidFill>
-                <a:latin typeface="Microsoft YaHei"/>
+                <a:latin typeface="微软雅黑" panose="020B0503020204020204" charset="-122"/>
               </a:defRPr>
             </a:pPr>
             <a:r>
@@ -14614,7 +14587,7 @@
                 <a:solidFill>
                   <a:srgbClr val="555555"/>
                 </a:solidFill>
-                <a:latin typeface="Microsoft YaHei"/>
+                <a:latin typeface="微软雅黑" panose="020B0503020204020204" charset="-122"/>
               </a:defRPr>
             </a:pPr>
             <a:r>
@@ -14630,7 +14603,7 @@
                 <a:solidFill>
                   <a:srgbClr val="555555"/>
                 </a:solidFill>
-                <a:latin typeface="Microsoft YaHei"/>
+                <a:latin typeface="微软雅黑" panose="020B0503020204020204" charset="-122"/>
               </a:defRPr>
             </a:pPr>
             <a:r>
@@ -14754,7 +14727,7 @@
                 <a:solidFill>
                   <a:srgbClr val="3498DB"/>
                 </a:solidFill>
-                <a:latin typeface="Microsoft YaHei"/>
+                <a:latin typeface="微软雅黑" panose="020B0503020204020204" charset="-122"/>
               </a:defRPr>
             </a:pPr>
             <a:r>
@@ -14793,7 +14766,7 @@
                 <a:solidFill>
                   <a:srgbClr val="555555"/>
                 </a:solidFill>
-                <a:latin typeface="Microsoft YaHei"/>
+                <a:latin typeface="微软雅黑" panose="020B0503020204020204" charset="-122"/>
               </a:defRPr>
             </a:pPr>
             <a:r>
@@ -14809,7 +14782,7 @@
                 <a:solidFill>
                   <a:srgbClr val="555555"/>
                 </a:solidFill>
-                <a:latin typeface="Microsoft YaHei"/>
+                <a:latin typeface="微软雅黑" panose="020B0503020204020204" charset="-122"/>
               </a:defRPr>
             </a:pPr>
             <a:r>
@@ -14825,7 +14798,7 @@
                 <a:solidFill>
                   <a:srgbClr val="555555"/>
                 </a:solidFill>
-                <a:latin typeface="Microsoft YaHei"/>
+                <a:latin typeface="微软雅黑" panose="020B0503020204020204" charset="-122"/>
               </a:defRPr>
             </a:pPr>
             <a:r>
@@ -14841,7 +14814,7 @@
                 <a:solidFill>
                   <a:srgbClr val="555555"/>
                 </a:solidFill>
-                <a:latin typeface="Microsoft YaHei"/>
+                <a:latin typeface="微软雅黑" panose="020B0503020204020204" charset="-122"/>
               </a:defRPr>
             </a:pPr>
             <a:r>
@@ -14857,7 +14830,7 @@
                 <a:solidFill>
                   <a:srgbClr val="555555"/>
                 </a:solidFill>
-                <a:latin typeface="Microsoft YaHei"/>
+                <a:latin typeface="微软雅黑" panose="020B0503020204020204" charset="-122"/>
               </a:defRPr>
             </a:pPr>
             <a:r>
@@ -14873,7 +14846,7 @@
                 <a:solidFill>
                   <a:srgbClr val="555555"/>
                 </a:solidFill>
-                <a:latin typeface="Microsoft YaHei"/>
+                <a:latin typeface="微软雅黑" panose="020B0503020204020204" charset="-122"/>
               </a:defRPr>
             </a:pPr>
             <a:r>
@@ -14909,7 +14882,7 @@
                 <a:solidFill>
                   <a:srgbClr val="2C3E50"/>
                 </a:solidFill>
-                <a:latin typeface="Microsoft YaHei"/>
+                <a:latin typeface="微软雅黑" panose="020B0503020204020204" charset="-122"/>
               </a:defRPr>
             </a:pPr>
             <a:r>
@@ -15005,7 +14978,7 @@
 </file>
 
 <file path=ppt/slides/slide4.xml><?xml version="1.0" encoding="utf-8"?>
-<p:sld xmlns:a="http://schemas.openxmlformats.org/drawingml/2006/main" xmlns:p="http://schemas.openxmlformats.org/presentationml/2006/main" xmlns:r="http://schemas.openxmlformats.org/officeDocument/2006/relationships">
+<p:sld xmlns:a="http://schemas.openxmlformats.org/drawingml/2006/main" xmlns:r="http://schemas.openxmlformats.org/officeDocument/2006/relationships" xmlns:p="http://schemas.openxmlformats.org/presentationml/2006/main">
   <p:cSld>
     <p:bg>
       <p:bgPr>
@@ -15182,7 +15155,7 @@
           </a:fontRef>
         </p:style>
         <p:txBody>
-          <a:bodyPr rtlCol="0" anchor="ctr" wrap="square"/>
+          <a:bodyPr wrap="square" rtlCol="0" anchor="ctr"/>
           <a:lstStyle/>
           <a:p>
             <a:pPr algn="ctr">
@@ -15190,20 +15163,9 @@
                 <a:solidFill>
                   <a:srgbClr val="555555"/>
                 </a:solidFill>
-                <a:latin typeface="Microsoft YaHei"/>
-              </a:defRPr>
-            </a:pPr>
-            <a:r>
-              <a:t>【用例图】</a:t>
-            </a:r>
-            <a:br/>
-            <a:r>
-              <a:t>见 diagrams/use_case.drawio</a:t>
-            </a:r>
-            <a:br/>
-            <a:r>
-              <a:t>请导出PNG后替换此占位符</a:t>
-            </a:r>
+                <a:latin typeface="微软雅黑" panose="020B0503020204020204" charset="-122"/>
+              </a:defRPr>
+            </a:pPr>
           </a:p>
         </p:txBody>
       </p:sp>
@@ -15215,7 +15177,7 @@
         </p:nvSpPr>
         <p:spPr>
           <a:xfrm>
-            <a:off x="540000" y="5580000"/>
+            <a:off x="672080" y="5212970"/>
             <a:ext cx="10800000" cy="1080000"/>
           </a:xfrm>
           <a:prstGeom prst="rect">
@@ -15237,7 +15199,7 @@
                 <a:solidFill>
                   <a:srgbClr val="555555"/>
                 </a:solidFill>
-                <a:latin typeface="Microsoft YaHei"/>
+                <a:latin typeface="微软雅黑" panose="020B0503020204020204" charset="-122"/>
               </a:defRPr>
             </a:pPr>
             <a:r>
@@ -15253,7 +15215,7 @@
                 <a:solidFill>
                   <a:srgbClr val="555555"/>
                 </a:solidFill>
-                <a:latin typeface="Microsoft YaHei"/>
+                <a:latin typeface="微软雅黑" panose="020B0503020204020204" charset="-122"/>
               </a:defRPr>
             </a:pPr>
             <a:r>
@@ -15269,7 +15231,7 @@
                 <a:solidFill>
                   <a:srgbClr val="555555"/>
                 </a:solidFill>
-                <a:latin typeface="Microsoft YaHei"/>
+                <a:latin typeface="微软雅黑" panose="020B0503020204020204" charset="-122"/>
               </a:defRPr>
             </a:pPr>
             <a:r>
@@ -15285,7 +15247,7 @@
                 <a:solidFill>
                   <a:srgbClr val="555555"/>
                 </a:solidFill>
-                <a:latin typeface="Microsoft YaHei"/>
+                <a:latin typeface="微软雅黑" panose="020B0503020204020204" charset="-122"/>
               </a:defRPr>
             </a:pPr>
             <a:r>
@@ -15372,6 +15334,30 @@
           </a:p>
         </p:txBody>
       </p:sp>
+      <p:pic>
+        <p:nvPicPr>
+          <p:cNvPr id="9" name="图片 8" descr="use_case"/>
+          <p:cNvPicPr>
+            <a:picLocks noChangeAspect="1"/>
+          </p:cNvPicPr>
+          <p:nvPr/>
+        </p:nvPicPr>
+        <p:blipFill>
+          <a:blip r:embed="rId1"/>
+          <a:stretch>
+            <a:fillRect/>
+          </a:stretch>
+        </p:blipFill>
+        <p:spPr>
+          <a:xfrm>
+            <a:off x="946150" y="899795"/>
+            <a:ext cx="6155055" cy="4509770"/>
+          </a:xfrm>
+          <a:prstGeom prst="rect">
+            <a:avLst/>
+          </a:prstGeom>
+        </p:spPr>
+      </p:pic>
     </p:spTree>
   </p:cSld>
   <p:clrMapOvr>
@@ -15381,7 +15367,7 @@
 </file>
 
 <file path=ppt/slides/slide5.xml><?xml version="1.0" encoding="utf-8"?>
-<p:sld xmlns:a="http://schemas.openxmlformats.org/drawingml/2006/main" xmlns:p="http://schemas.openxmlformats.org/presentationml/2006/main" xmlns:r="http://schemas.openxmlformats.org/officeDocument/2006/relationships">
+<p:sld xmlns:a="http://schemas.openxmlformats.org/drawingml/2006/main" xmlns:r="http://schemas.openxmlformats.org/officeDocument/2006/relationships" xmlns:p="http://schemas.openxmlformats.org/presentationml/2006/main">
   <p:cSld>
     <p:bg>
       <p:bgPr>
@@ -15591,7 +15577,7 @@
                 <a:solidFill>
                   <a:srgbClr val="3498DB"/>
                 </a:solidFill>
-                <a:latin typeface="Microsoft YaHei"/>
+                <a:latin typeface="微软雅黑" panose="020B0503020204020204" charset="-122"/>
               </a:defRPr>
             </a:pPr>
             <a:r>
@@ -15673,7 +15659,7 @@
                 <a:solidFill>
                   <a:srgbClr val="000000"/>
                 </a:solidFill>
-                <a:latin typeface="Microsoft YaHei"/>
+                <a:latin typeface="微软雅黑" panose="020B0503020204020204" charset="-122"/>
               </a:defRPr>
             </a:pPr>
             <a:r>
@@ -15689,7 +15675,7 @@
                 <a:solidFill>
                   <a:srgbClr val="000000"/>
                 </a:solidFill>
-                <a:latin typeface="Microsoft YaHei"/>
+                <a:latin typeface="微软雅黑" panose="020B0503020204020204" charset="-122"/>
               </a:defRPr>
             </a:pPr>
             <a:r>
@@ -15705,7 +15691,7 @@
                 <a:solidFill>
                   <a:srgbClr val="000000"/>
                 </a:solidFill>
-                <a:latin typeface="Microsoft YaHei"/>
+                <a:latin typeface="微软雅黑" panose="020B0503020204020204" charset="-122"/>
               </a:defRPr>
             </a:pPr>
             <a:r>
@@ -15721,7 +15707,7 @@
                 <a:solidFill>
                   <a:srgbClr val="000000"/>
                 </a:solidFill>
-                <a:latin typeface="Microsoft YaHei"/>
+                <a:latin typeface="微软雅黑" panose="020B0503020204020204" charset="-122"/>
               </a:defRPr>
             </a:pPr>
             <a:r>
@@ -15737,7 +15723,7 @@
                 <a:solidFill>
                   <a:srgbClr val="000000"/>
                 </a:solidFill>
-                <a:latin typeface="Microsoft YaHei"/>
+                <a:latin typeface="微软雅黑" panose="020B0503020204020204" charset="-122"/>
               </a:defRPr>
             </a:pPr>
             <a:r>
@@ -15753,7 +15739,7 @@
                 <a:solidFill>
                   <a:srgbClr val="000000"/>
                 </a:solidFill>
-                <a:latin typeface="Microsoft YaHei"/>
+                <a:latin typeface="微软雅黑" panose="020B0503020204020204" charset="-122"/>
               </a:defRPr>
             </a:pPr>
             <a:r>
@@ -15769,7 +15755,7 @@
                 <a:solidFill>
                   <a:srgbClr val="000000"/>
                 </a:solidFill>
-                <a:latin typeface="Microsoft YaHei"/>
+                <a:latin typeface="微软雅黑" panose="020B0503020204020204" charset="-122"/>
               </a:defRPr>
             </a:pPr>
             <a:r>
@@ -15785,7 +15771,7 @@
                 <a:solidFill>
                   <a:srgbClr val="000000"/>
                 </a:solidFill>
-                <a:latin typeface="Microsoft YaHei"/>
+                <a:latin typeface="微软雅黑" panose="020B0503020204020204" charset="-122"/>
               </a:defRPr>
             </a:pPr>
             <a:r>
@@ -15866,7 +15852,7 @@
                 <a:solidFill>
                   <a:srgbClr val="E74C3C"/>
                 </a:solidFill>
-                <a:latin typeface="Microsoft YaHei"/>
+                <a:latin typeface="微软雅黑" panose="020B0503020204020204" charset="-122"/>
               </a:defRPr>
             </a:pPr>
             <a:r>
@@ -15927,7 +15913,7 @@
         <p:spPr>
           <a:xfrm>
             <a:off x="6660000" y="1944000"/>
-            <a:ext cx="4860000" cy="3960000"/>
+            <a:ext cx="4860000" cy="4184650"/>
           </a:xfrm>
           <a:prstGeom prst="rect">
             <a:avLst/>
@@ -15948,7 +15934,7 @@
                 <a:solidFill>
                   <a:srgbClr val="000000"/>
                 </a:solidFill>
-                <a:latin typeface="Microsoft YaHei"/>
+                <a:latin typeface="微软雅黑" panose="020B0503020204020204" charset="-122"/>
               </a:defRPr>
             </a:pPr>
             <a:r>
@@ -15964,7 +15950,7 @@
                 <a:solidFill>
                   <a:srgbClr val="000000"/>
                 </a:solidFill>
-                <a:latin typeface="Microsoft YaHei"/>
+                <a:latin typeface="微软雅黑" panose="020B0503020204020204" charset="-122"/>
               </a:defRPr>
             </a:pPr>
             <a:r>
@@ -15980,7 +15966,7 @@
                 <a:solidFill>
                   <a:srgbClr val="000000"/>
                 </a:solidFill>
-                <a:latin typeface="Microsoft YaHei"/>
+                <a:latin typeface="微软雅黑" panose="020B0503020204020204" charset="-122"/>
               </a:defRPr>
             </a:pPr>
             <a:r>
@@ -15996,9 +15982,12 @@
                 <a:solidFill>
                   <a:srgbClr val="000000"/>
                 </a:solidFill>
-                <a:latin typeface="Microsoft YaHei"/>
-              </a:defRPr>
-            </a:pPr>
+                <a:latin typeface="微软雅黑" panose="020B0503020204020204" charset="-122"/>
+              </a:defRPr>
+            </a:pPr>
+            <a:r>
+              <a:t>可用性 (Usability)</a:t>
+            </a:r>
           </a:p>
           <a:p>
             <a:pPr algn="l">
@@ -16009,11 +15998,11 @@
                 <a:solidFill>
                   <a:srgbClr val="000000"/>
                 </a:solidFill>
-                <a:latin typeface="Microsoft YaHei"/>
-              </a:defRPr>
-            </a:pPr>
-            <a:r>
-              <a:t>可用性 (Usability)</a:t>
+                <a:latin typeface="微软雅黑" panose="020B0503020204020204" charset="-122"/>
+              </a:defRPr>
+            </a:pPr>
+            <a:r>
+              <a:t>  - Bootstrap 5 响应式设计</a:t>
             </a:r>
           </a:p>
           <a:p>
@@ -16025,11 +16014,11 @@
                 <a:solidFill>
                   <a:srgbClr val="000000"/>
                 </a:solidFill>
-                <a:latin typeface="Microsoft YaHei"/>
-              </a:defRPr>
-            </a:pPr>
-            <a:r>
-              <a:t>  - Bootstrap 5 响应式设计</a:t>
+                <a:latin typeface="微软雅黑" panose="020B0503020204020204" charset="-122"/>
+              </a:defRPr>
+            </a:pPr>
+            <a:r>
+              <a:t>  - 直观的导航与操作流程</a:t>
             </a:r>
           </a:p>
           <a:p>
@@ -16041,11 +16030,11 @@
                 <a:solidFill>
                   <a:srgbClr val="000000"/>
                 </a:solidFill>
-                <a:latin typeface="Microsoft YaHei"/>
-              </a:defRPr>
-            </a:pPr>
-            <a:r>
-              <a:t>  - 直观的导航与操作流程</a:t>
+                <a:latin typeface="微软雅黑" panose="020B0503020204020204" charset="-122"/>
+              </a:defRPr>
+            </a:pPr>
+            <a:r>
+              <a:t>可靠性 (Reliability)</a:t>
             </a:r>
           </a:p>
           <a:p>
@@ -16057,9 +16046,12 @@
                 <a:solidFill>
                   <a:srgbClr val="000000"/>
                 </a:solidFill>
-                <a:latin typeface="Microsoft YaHei"/>
-              </a:defRPr>
-            </a:pPr>
+                <a:latin typeface="微软雅黑" panose="020B0503020204020204" charset="-122"/>
+              </a:defRPr>
+            </a:pPr>
+            <a:r>
+              <a:t>  - 数据库事务保证数据一致性</a:t>
+            </a:r>
           </a:p>
           <a:p>
             <a:pPr algn="l">
@@ -16070,11 +16062,11 @@
                 <a:solidFill>
                   <a:srgbClr val="000000"/>
                 </a:solidFill>
-                <a:latin typeface="Microsoft YaHei"/>
-              </a:defRPr>
-            </a:pPr>
-            <a:r>
-              <a:t>可靠性 (Reliability)</a:t>
+                <a:latin typeface="微软雅黑" panose="020B0503020204020204" charset="-122"/>
+              </a:defRPr>
+            </a:pPr>
+            <a:r>
+              <a:t>  - 订单状态机防止非法流转</a:t>
             </a:r>
           </a:p>
           <a:p>
@@ -16086,11 +16078,11 @@
                 <a:solidFill>
                   <a:srgbClr val="000000"/>
                 </a:solidFill>
-                <a:latin typeface="Microsoft YaHei"/>
-              </a:defRPr>
-            </a:pPr>
-            <a:r>
-              <a:t>  - 数据库事务保证数据一致性</a:t>
+                <a:latin typeface="微软雅黑" panose="020B0503020204020204" charset="-122"/>
+              </a:defRPr>
+            </a:pPr>
+            <a:r>
+              <a:t>可维护性 (Maintainability)</a:t>
             </a:r>
           </a:p>
           <a:p>
@@ -16102,11 +16094,11 @@
                 <a:solidFill>
                   <a:srgbClr val="000000"/>
                 </a:solidFill>
-                <a:latin typeface="Microsoft YaHei"/>
-              </a:defRPr>
-            </a:pPr>
-            <a:r>
-              <a:t>  - 订单状态机防止非法流转</a:t>
+                <a:latin typeface="微软雅黑" panose="020B0503020204020204" charset="-122"/>
+              </a:defRPr>
+            </a:pPr>
+            <a:r>
+              <a:t>  - Django MTV 分层架构</a:t>
             </a:r>
           </a:p>
           <a:p>
@@ -16118,52 +16110,7 @@
                 <a:solidFill>
                   <a:srgbClr val="000000"/>
                 </a:solidFill>
-                <a:latin typeface="Microsoft YaHei"/>
-              </a:defRPr>
-            </a:pPr>
-          </a:p>
-          <a:p>
-            <a:pPr algn="l">
-              <a:spcAft>
-                <a:spcPts val="1200"/>
-              </a:spcAft>
-              <a:defRPr sz="1300">
-                <a:solidFill>
-                  <a:srgbClr val="000000"/>
-                </a:solidFill>
-                <a:latin typeface="Microsoft YaHei"/>
-              </a:defRPr>
-            </a:pPr>
-            <a:r>
-              <a:t>可维护性 (Maintainability)</a:t>
-            </a:r>
-          </a:p>
-          <a:p>
-            <a:pPr algn="l">
-              <a:spcAft>
-                <a:spcPts val="1200"/>
-              </a:spcAft>
-              <a:defRPr sz="1300">
-                <a:solidFill>
-                  <a:srgbClr val="000000"/>
-                </a:solidFill>
-                <a:latin typeface="Microsoft YaHei"/>
-              </a:defRPr>
-            </a:pPr>
-            <a:r>
-              <a:t>  - Django MTV 分层架构</a:t>
-            </a:r>
-          </a:p>
-          <a:p>
-            <a:pPr algn="l">
-              <a:spcAft>
-                <a:spcPts val="1200"/>
-              </a:spcAft>
-              <a:defRPr sz="1300">
-                <a:solidFill>
-                  <a:srgbClr val="000000"/>
-                </a:solidFill>
-                <a:latin typeface="Microsoft YaHei"/>
+                <a:latin typeface="微软雅黑" panose="020B0503020204020204" charset="-122"/>
               </a:defRPr>
             </a:pPr>
             <a:r>
@@ -16259,7 +16206,7 @@
 </file>
 
 <file path=ppt/slides/slide6.xml><?xml version="1.0" encoding="utf-8"?>
-<p:sld xmlns:a="http://schemas.openxmlformats.org/drawingml/2006/main" xmlns:p="http://schemas.openxmlformats.org/presentationml/2006/main" xmlns:r="http://schemas.openxmlformats.org/officeDocument/2006/relationships">
+<p:sld xmlns:a="http://schemas.openxmlformats.org/drawingml/2006/main" xmlns:r="http://schemas.openxmlformats.org/officeDocument/2006/relationships" xmlns:p="http://schemas.openxmlformats.org/presentationml/2006/main">
   <p:cSld>
     <p:bg>
       <p:bgPr>
@@ -16436,7 +16383,7 @@
           </a:fontRef>
         </p:style>
         <p:txBody>
-          <a:bodyPr rtlCol="0" anchor="ctr" wrap="square"/>
+          <a:bodyPr wrap="square" rtlCol="0" anchor="ctr"/>
           <a:lstStyle/>
           <a:p>
             <a:pPr algn="ctr">
@@ -16444,20 +16391,9 @@
                 <a:solidFill>
                   <a:srgbClr val="555555"/>
                 </a:solidFill>
-                <a:latin typeface="Microsoft YaHei"/>
-              </a:defRPr>
-            </a:pPr>
-            <a:r>
-              <a:t>【活动图】</a:t>
-            </a:r>
-            <a:br/>
-            <a:r>
-              <a:t>见 diagrams/activity_buy_item.drawio</a:t>
-            </a:r>
-            <a:br/>
-            <a:r>
-              <a:t>请导出PNG后替换此占位符</a:t>
-            </a:r>
+                <a:latin typeface="微软雅黑" panose="020B0503020204020204" charset="-122"/>
+              </a:defRPr>
+            </a:pPr>
           </a:p>
         </p:txBody>
       </p:sp>
@@ -16491,7 +16427,7 @@
                 <a:solidFill>
                   <a:srgbClr val="555555"/>
                 </a:solidFill>
-                <a:latin typeface="Microsoft YaHei"/>
+                <a:latin typeface="微软雅黑" panose="020B0503020204020204" charset="-122"/>
               </a:defRPr>
             </a:pPr>
             <a:r>
@@ -16507,7 +16443,7 @@
                 <a:solidFill>
                   <a:srgbClr val="555555"/>
                 </a:solidFill>
-                <a:latin typeface="Microsoft YaHei"/>
+                <a:latin typeface="微软雅黑" panose="020B0503020204020204" charset="-122"/>
               </a:defRPr>
             </a:pPr>
             <a:r>
@@ -16523,7 +16459,7 @@
                 <a:solidFill>
                   <a:srgbClr val="555555"/>
                 </a:solidFill>
-                <a:latin typeface="Microsoft YaHei"/>
+                <a:latin typeface="微软雅黑" panose="020B0503020204020204" charset="-122"/>
               </a:defRPr>
             </a:pPr>
             <a:r>
@@ -16610,6 +16546,30 @@
           </a:p>
         </p:txBody>
       </p:sp>
+      <p:pic>
+        <p:nvPicPr>
+          <p:cNvPr id="9" name="图片 8" descr="activity_purchase"/>
+          <p:cNvPicPr>
+            <a:picLocks noChangeAspect="1"/>
+          </p:cNvPicPr>
+          <p:nvPr/>
+        </p:nvPicPr>
+        <p:blipFill>
+          <a:blip r:embed="rId1"/>
+          <a:stretch>
+            <a:fillRect/>
+          </a:stretch>
+        </p:blipFill>
+        <p:spPr>
+          <a:xfrm>
+            <a:off x="1056640" y="1029335"/>
+            <a:ext cx="5769610" cy="4050665"/>
+          </a:xfrm>
+          <a:prstGeom prst="rect">
+            <a:avLst/>
+          </a:prstGeom>
+        </p:spPr>
+      </p:pic>
     </p:spTree>
   </p:cSld>
   <p:clrMapOvr>
@@ -16619,7 +16579,7 @@
 </file>
 
 <file path=ppt/slides/slide7.xml><?xml version="1.0" encoding="utf-8"?>
-<p:sld xmlns:a="http://schemas.openxmlformats.org/drawingml/2006/main" xmlns:p="http://schemas.openxmlformats.org/presentationml/2006/main" xmlns:r="http://schemas.openxmlformats.org/officeDocument/2006/relationships">
+<p:sld xmlns:a="http://schemas.openxmlformats.org/drawingml/2006/main" xmlns:r="http://schemas.openxmlformats.org/officeDocument/2006/relationships" xmlns:p="http://schemas.openxmlformats.org/presentationml/2006/main">
   <p:cSld>
     <p:bg>
       <p:bgPr>
@@ -16796,7 +16756,7 @@
           </a:fontRef>
         </p:style>
         <p:txBody>
-          <a:bodyPr rtlCol="0" anchor="ctr" wrap="square"/>
+          <a:bodyPr wrap="square" rtlCol="0" anchor="ctr"/>
           <a:lstStyle/>
           <a:p>
             <a:pPr algn="ctr">
@@ -16804,20 +16764,9 @@
                 <a:solidFill>
                   <a:srgbClr val="555555"/>
                 </a:solidFill>
-                <a:latin typeface="Microsoft YaHei"/>
-              </a:defRPr>
-            </a:pPr>
-            <a:r>
-              <a:t>【类图】</a:t>
-            </a:r>
-            <a:br/>
-            <a:r>
-              <a:t>见 diagrams/class_diagram.drawio</a:t>
-            </a:r>
-            <a:br/>
-            <a:r>
-              <a:t>请导出PNG后替换此占位符</a:t>
-            </a:r>
+                <a:latin typeface="微软雅黑" panose="020B0503020204020204" charset="-122"/>
+              </a:defRPr>
+            </a:pPr>
           </a:p>
         </p:txBody>
       </p:sp>
@@ -16829,7 +16778,7 @@
         </p:nvSpPr>
         <p:spPr>
           <a:xfrm>
-            <a:off x="540000" y="5580000"/>
+            <a:off x="6665845" y="1268985"/>
             <a:ext cx="10800000" cy="1080000"/>
           </a:xfrm>
           <a:prstGeom prst="rect">
@@ -16851,7 +16800,7 @@
                 <a:solidFill>
                   <a:srgbClr val="555555"/>
                 </a:solidFill>
-                <a:latin typeface="Microsoft YaHei"/>
+                <a:latin typeface="微软雅黑" panose="020B0503020204020204" charset="-122"/>
               </a:defRPr>
             </a:pPr>
             <a:r>
@@ -16867,7 +16816,7 @@
                 <a:solidFill>
                   <a:srgbClr val="555555"/>
                 </a:solidFill>
-                <a:latin typeface="Microsoft YaHei"/>
+                <a:latin typeface="微软雅黑" panose="020B0503020204020204" charset="-122"/>
               </a:defRPr>
             </a:pPr>
             <a:r>
@@ -16883,7 +16832,7 @@
                 <a:solidFill>
                   <a:srgbClr val="555555"/>
                 </a:solidFill>
-                <a:latin typeface="Microsoft YaHei"/>
+                <a:latin typeface="微软雅黑" panose="020B0503020204020204" charset="-122"/>
               </a:defRPr>
             </a:pPr>
             <a:r>
@@ -16899,7 +16848,7 @@
                 <a:solidFill>
                   <a:srgbClr val="555555"/>
                 </a:solidFill>
-                <a:latin typeface="Microsoft YaHei"/>
+                <a:latin typeface="微软雅黑" panose="020B0503020204020204" charset="-122"/>
               </a:defRPr>
             </a:pPr>
             <a:r>
@@ -16915,7 +16864,7 @@
                 <a:solidFill>
                   <a:srgbClr val="555555"/>
                 </a:solidFill>
-                <a:latin typeface="Microsoft YaHei"/>
+                <a:latin typeface="微软雅黑" panose="020B0503020204020204" charset="-122"/>
               </a:defRPr>
             </a:pPr>
             <a:r>
@@ -16931,7 +16880,7 @@
                 <a:solidFill>
                   <a:srgbClr val="555555"/>
                 </a:solidFill>
-                <a:latin typeface="Microsoft YaHei"/>
+                <a:latin typeface="微软雅黑" panose="020B0503020204020204" charset="-122"/>
               </a:defRPr>
             </a:pPr>
             <a:r>
@@ -16947,7 +16896,7 @@
                 <a:solidFill>
                   <a:srgbClr val="555555"/>
                 </a:solidFill>
-                <a:latin typeface="Microsoft YaHei"/>
+                <a:latin typeface="微软雅黑" panose="020B0503020204020204" charset="-122"/>
               </a:defRPr>
             </a:pPr>
             <a:r>
@@ -17034,6 +16983,30 @@
           </a:p>
         </p:txBody>
       </p:sp>
+      <p:pic>
+        <p:nvPicPr>
+          <p:cNvPr id="9" name="图片 8" descr="class_diagram"/>
+          <p:cNvPicPr>
+            <a:picLocks noChangeAspect="1"/>
+          </p:cNvPicPr>
+          <p:nvPr/>
+        </p:nvPicPr>
+        <p:blipFill>
+          <a:blip r:embed="rId1"/>
+          <a:stretch>
+            <a:fillRect/>
+          </a:stretch>
+        </p:blipFill>
+        <p:spPr>
+          <a:xfrm>
+            <a:off x="539750" y="1137285"/>
+            <a:ext cx="6148705" cy="4200525"/>
+          </a:xfrm>
+          <a:prstGeom prst="rect">
+            <a:avLst/>
+          </a:prstGeom>
+        </p:spPr>
+      </p:pic>
     </p:spTree>
   </p:cSld>
   <p:clrMapOvr>
@@ -17043,7 +17016,7 @@
 </file>
 
 <file path=ppt/slides/slide8.xml><?xml version="1.0" encoding="utf-8"?>
-<p:sld xmlns:a="http://schemas.openxmlformats.org/drawingml/2006/main" xmlns:p="http://schemas.openxmlformats.org/presentationml/2006/main" xmlns:r="http://schemas.openxmlformats.org/officeDocument/2006/relationships">
+<p:sld xmlns:a="http://schemas.openxmlformats.org/drawingml/2006/main" xmlns:r="http://schemas.openxmlformats.org/officeDocument/2006/relationships" xmlns:p="http://schemas.openxmlformats.org/presentationml/2006/main">
   <p:cSld>
     <p:bg>
       <p:bgPr>
@@ -17220,7 +17193,7 @@
           </a:fontRef>
         </p:style>
         <p:txBody>
-          <a:bodyPr rtlCol="0" anchor="ctr" wrap="square"/>
+          <a:bodyPr wrap="square" rtlCol="0" anchor="ctr"/>
           <a:lstStyle/>
           <a:p>
             <a:pPr algn="ctr">
@@ -17228,20 +17201,9 @@
                 <a:solidFill>
                   <a:srgbClr val="555555"/>
                 </a:solidFill>
-                <a:latin typeface="Microsoft YaHei"/>
-              </a:defRPr>
-            </a:pPr>
-            <a:r>
-              <a:t>【时序图】</a:t>
-            </a:r>
-            <a:br/>
-            <a:r>
-              <a:t>见 diagrams/sequence_buy_trade.drawio</a:t>
-            </a:r>
-            <a:br/>
-            <a:r>
-              <a:t>请导出PNG后替换此占位符</a:t>
-            </a:r>
+                <a:latin typeface="微软雅黑" panose="020B0503020204020204" charset="-122"/>
+              </a:defRPr>
+            </a:pPr>
           </a:p>
         </p:txBody>
       </p:sp>
@@ -17253,8 +17215,8 @@
         </p:nvSpPr>
         <p:spPr>
           <a:xfrm>
-            <a:off x="540000" y="5580000"/>
-            <a:ext cx="10800000" cy="1080000"/>
+            <a:off x="360045" y="4912995"/>
+            <a:ext cx="10415270" cy="724535"/>
           </a:xfrm>
           <a:prstGeom prst="rect">
             <a:avLst/>
@@ -17263,7 +17225,7 @@
         </p:spPr>
         <p:txBody>
           <a:bodyPr wrap="square">
-            <a:spAutoFit/>
+            <a:noAutofit/>
           </a:bodyPr>
           <a:lstStyle/>
           <a:p>
@@ -17275,7 +17237,7 @@
                 <a:solidFill>
                   <a:srgbClr val="555555"/>
                 </a:solidFill>
-                <a:latin typeface="Microsoft YaHei"/>
+                <a:latin typeface="微软雅黑" panose="020B0503020204020204" charset="-122"/>
               </a:defRPr>
             </a:pPr>
             <a:r>
@@ -17291,7 +17253,7 @@
                 <a:solidFill>
                   <a:srgbClr val="555555"/>
                 </a:solidFill>
-                <a:latin typeface="Microsoft YaHei"/>
+                <a:latin typeface="微软雅黑" panose="020B0503020204020204" charset="-122"/>
               </a:defRPr>
             </a:pPr>
             <a:r>
@@ -17307,7 +17269,7 @@
                 <a:solidFill>
                   <a:srgbClr val="555555"/>
                 </a:solidFill>
-                <a:latin typeface="Microsoft YaHei"/>
+                <a:latin typeface="微软雅黑" panose="020B0503020204020204" charset="-122"/>
               </a:defRPr>
             </a:pPr>
             <a:r>
@@ -17323,7 +17285,7 @@
                 <a:solidFill>
                   <a:srgbClr val="555555"/>
                 </a:solidFill>
-                <a:latin typeface="Microsoft YaHei"/>
+                <a:latin typeface="微软雅黑" panose="020B0503020204020204" charset="-122"/>
               </a:defRPr>
             </a:pPr>
             <a:r>
@@ -17339,7 +17301,7 @@
                 <a:solidFill>
                   <a:srgbClr val="555555"/>
                 </a:solidFill>
-                <a:latin typeface="Microsoft YaHei"/>
+                <a:latin typeface="微软雅黑" panose="020B0503020204020204" charset="-122"/>
               </a:defRPr>
             </a:pPr>
             <a:r>
@@ -17426,6 +17388,30 @@
           </a:p>
         </p:txBody>
       </p:sp>
+      <p:pic>
+        <p:nvPicPr>
+          <p:cNvPr id="10" name="图片 9" descr="sequence_purchase"/>
+          <p:cNvPicPr>
+            <a:picLocks noChangeAspect="1"/>
+          </p:cNvPicPr>
+          <p:nvPr/>
+        </p:nvPicPr>
+        <p:blipFill>
+          <a:blip r:embed="rId1"/>
+          <a:stretch>
+            <a:fillRect/>
+          </a:stretch>
+        </p:blipFill>
+        <p:spPr>
+          <a:xfrm>
+            <a:off x="201930" y="1164590"/>
+            <a:ext cx="7035165" cy="3938905"/>
+          </a:xfrm>
+          <a:prstGeom prst="rect">
+            <a:avLst/>
+          </a:prstGeom>
+        </p:spPr>
+      </p:pic>
     </p:spTree>
   </p:cSld>
   <p:clrMapOvr>
@@ -17435,7 +17421,7 @@
 </file>
 
 <file path=ppt/slides/slide9.xml><?xml version="1.0" encoding="utf-8"?>
-<p:sld xmlns:a="http://schemas.openxmlformats.org/drawingml/2006/main" xmlns:p="http://schemas.openxmlformats.org/presentationml/2006/main" xmlns:r="http://schemas.openxmlformats.org/officeDocument/2006/relationships">
+<p:sld xmlns:a="http://schemas.openxmlformats.org/drawingml/2006/main" xmlns:r="http://schemas.openxmlformats.org/officeDocument/2006/relationships" xmlns:p="http://schemas.openxmlformats.org/presentationml/2006/main">
   <p:cSld>
     <p:bg>
       <p:bgPr>
@@ -17612,7 +17598,7 @@
           </a:fontRef>
         </p:style>
         <p:txBody>
-          <a:bodyPr rtlCol="0" anchor="ctr" wrap="square"/>
+          <a:bodyPr wrap="square" rtlCol="0" anchor="ctr"/>
           <a:lstStyle/>
           <a:p>
             <a:pPr algn="ctr">
@@ -17620,7 +17606,7 @@
                 <a:solidFill>
                   <a:srgbClr val="555555"/>
                 </a:solidFill>
-                <a:latin typeface="Microsoft YaHei"/>
+                <a:latin typeface="微软雅黑" panose="020B0503020204020204" charset="-122"/>
               </a:defRPr>
             </a:pPr>
             <a:r>
@@ -17707,7 +17693,7 @@
                 <a:solidFill>
                   <a:srgbClr val="555555"/>
                 </a:solidFill>
-                <a:latin typeface="Microsoft YaHei"/>
+                <a:latin typeface="微软雅黑" panose="020B0503020204020204" charset="-122"/>
               </a:defRPr>
             </a:pPr>
             <a:r>
@@ -17743,7 +17729,7 @@
                 <a:solidFill>
                   <a:srgbClr val="555555"/>
                 </a:solidFill>
-                <a:latin typeface="Microsoft YaHei"/>
+                <a:latin typeface="微软雅黑" panose="020B0503020204020204" charset="-122"/>
               </a:defRPr>
             </a:pPr>
             <a:r>
@@ -17822,7 +17808,7 @@
                 <a:solidFill>
                   <a:srgbClr val="3498DB"/>
                 </a:solidFill>
-                <a:latin typeface="Microsoft YaHei"/>
+                <a:latin typeface="微软雅黑" panose="020B0503020204020204" charset="-122"/>
               </a:defRPr>
             </a:pPr>
             <a:r>
@@ -17858,7 +17844,7 @@
                 <a:solidFill>
                   <a:srgbClr val="555555"/>
                 </a:solidFill>
-                <a:latin typeface="Microsoft YaHei"/>
+                <a:latin typeface="微软雅黑" panose="020B0503020204020204" charset="-122"/>
               </a:defRPr>
             </a:pPr>
             <a:r>
@@ -17937,7 +17923,7 @@
                 <a:solidFill>
                   <a:srgbClr val="E67E22"/>
                 </a:solidFill>
-                <a:latin typeface="Microsoft YaHei"/>
+                <a:latin typeface="微软雅黑" panose="020B0503020204020204" charset="-122"/>
               </a:defRPr>
             </a:pPr>
             <a:r>
@@ -17973,7 +17959,7 @@
                 <a:solidFill>
                   <a:srgbClr val="555555"/>
                 </a:solidFill>
-                <a:latin typeface="Microsoft YaHei"/>
+                <a:latin typeface="微软雅黑" panose="020B0503020204020204" charset="-122"/>
               </a:defRPr>
             </a:pPr>
             <a:r>
@@ -18052,7 +18038,7 @@
                 <a:solidFill>
                   <a:srgbClr val="27AE60"/>
                 </a:solidFill>
-                <a:latin typeface="Microsoft YaHei"/>
+                <a:latin typeface="微软雅黑" panose="020B0503020204020204" charset="-122"/>
               </a:defRPr>
             </a:pPr>
             <a:r>
@@ -18088,7 +18074,7 @@
                 <a:solidFill>
                   <a:srgbClr val="555555"/>
                 </a:solidFill>
-                <a:latin typeface="Microsoft YaHei"/>
+                <a:latin typeface="微软雅黑" panose="020B0503020204020204" charset="-122"/>
               </a:defRPr>
             </a:pPr>
             <a:r>
@@ -18167,7 +18153,7 @@
                 <a:solidFill>
                   <a:srgbClr val="E74C3C"/>
                 </a:solidFill>
-                <a:latin typeface="Microsoft YaHei"/>
+                <a:latin typeface="微软雅黑" panose="020B0503020204020204" charset="-122"/>
               </a:defRPr>
             </a:pPr>
             <a:r>
@@ -18203,7 +18189,7 @@
                 <a:solidFill>
                   <a:srgbClr val="555555"/>
                 </a:solidFill>
-                <a:latin typeface="Microsoft YaHei"/>
+                <a:latin typeface="微软雅黑" panose="020B0503020204020204" charset="-122"/>
               </a:defRPr>
             </a:pPr>
             <a:r>
@@ -18614,6 +18600,10 @@
       </a:style>
     </a:lnDef>
   </a:objectDefaults>
-  <a:extraClrSchemeLst/>
+  <a:extLst>
+    <a:ext uri="{05A4C25C-085E-4340-85A3-A5531E510DB2}">
+      <thm15:themeFamily xmlns:thm15="http://schemas.microsoft.com/office/thememl/2012/main" name="Office Theme" id="{62F939B6-93AF-4DB8-9C6B-D6C7DFDC589F}" vid="{4A3C46E8-61CC-4603-A589-7422A47A8E4A}"/>
+    </a:ext>
+  </a:extLst>
 </a:theme>
 </file>